--- a/Prezentimi - Genpact.pptx
+++ b/Prezentimi - Genpact.pptx
@@ -5,45 +5,47 @@
     <p:sldMasterId id="2147483659" r:id="rId1"/>
   </p:sldMasterIdLst>
   <p:notesMasterIdLst>
-    <p:notesMasterId r:id="rId14"/>
+    <p:notesMasterId r:id="rId16"/>
   </p:notesMasterIdLst>
   <p:sldIdLst>
     <p:sldId id="256" r:id="rId2"/>
     <p:sldId id="257" r:id="rId3"/>
     <p:sldId id="258" r:id="rId4"/>
-    <p:sldId id="259" r:id="rId5"/>
-    <p:sldId id="260" r:id="rId6"/>
-    <p:sldId id="261" r:id="rId7"/>
-    <p:sldId id="262" r:id="rId8"/>
-    <p:sldId id="263" r:id="rId9"/>
-    <p:sldId id="264" r:id="rId10"/>
-    <p:sldId id="265" r:id="rId11"/>
-    <p:sldId id="266" r:id="rId12"/>
-    <p:sldId id="268" r:id="rId13"/>
+    <p:sldId id="269" r:id="rId5"/>
+    <p:sldId id="259" r:id="rId6"/>
+    <p:sldId id="260" r:id="rId7"/>
+    <p:sldId id="270" r:id="rId8"/>
+    <p:sldId id="261" r:id="rId9"/>
+    <p:sldId id="262" r:id="rId10"/>
+    <p:sldId id="263" r:id="rId11"/>
+    <p:sldId id="264" r:id="rId12"/>
+    <p:sldId id="265" r:id="rId13"/>
+    <p:sldId id="266" r:id="rId14"/>
+    <p:sldId id="268" r:id="rId15"/>
   </p:sldIdLst>
   <p:sldSz cx="12192000" cy="6858000"/>
   <p:notesSz cx="6858000" cy="9144000"/>
   <p:embeddedFontLst>
     <p:embeddedFont>
       <p:font typeface="Calibri" panose="020F0502020204030204" pitchFamily="34" charset="0"/>
-      <p:regular r:id="rId15"/>
-      <p:bold r:id="rId16"/>
-      <p:italic r:id="rId17"/>
-      <p:boldItalic r:id="rId18"/>
+      <p:regular r:id="rId17"/>
+      <p:bold r:id="rId18"/>
+      <p:italic r:id="rId19"/>
+      <p:boldItalic r:id="rId20"/>
     </p:embeddedFont>
     <p:embeddedFont>
       <p:font typeface="Lato" panose="020F0502020204030203" pitchFamily="34" charset="0"/>
-      <p:regular r:id="rId19"/>
-      <p:bold r:id="rId20"/>
-      <p:italic r:id="rId21"/>
-      <p:boldItalic r:id="rId22"/>
+      <p:regular r:id="rId21"/>
+      <p:bold r:id="rId22"/>
+      <p:italic r:id="rId23"/>
+      <p:boldItalic r:id="rId24"/>
     </p:embeddedFont>
     <p:embeddedFont>
       <p:font typeface="Poppins" panose="00000500000000000000" pitchFamily="2" charset="0"/>
-      <p:regular r:id="rId23"/>
-      <p:bold r:id="rId24"/>
-      <p:italic r:id="rId25"/>
-      <p:boldItalic r:id="rId26"/>
+      <p:regular r:id="rId25"/>
+      <p:bold r:id="rId26"/>
+      <p:italic r:id="rId27"/>
+      <p:boldItalic r:id="rId28"/>
     </p:embeddedFont>
   </p:embeddedFontLst>
   <p:defaultTextStyle>
@@ -1012,6 +1014,300 @@
   <p:cSld>
     <p:spTree>
       <p:nvGrpSpPr>
+        <p:cNvPr id="1" name="Shape 193"/>
+        <p:cNvGrpSpPr/>
+        <p:nvPr/>
+      </p:nvGrpSpPr>
+      <p:grpSpPr>
+        <a:xfrm>
+          <a:off x="0" y="0"/>
+          <a:ext cx="0" cy="0"/>
+          <a:chOff x="0" y="0"/>
+          <a:chExt cx="0" cy="0"/>
+        </a:xfrm>
+      </p:grpSpPr>
+      <p:sp>
+        <p:nvSpPr>
+          <p:cNvPr id="194" name="Google Shape;194;p8:notes"/>
+          <p:cNvSpPr txBox="1">
+            <a:spLocks noGrp="1"/>
+          </p:cNvSpPr>
+          <p:nvPr>
+            <p:ph type="body" idx="1"/>
+          </p:nvPr>
+        </p:nvSpPr>
+        <p:spPr>
+          <a:xfrm>
+            <a:off x="685800" y="4343400"/>
+            <a:ext cx="5486400" cy="4114800"/>
+          </a:xfrm>
+          <a:prstGeom prst="rect">
+            <a:avLst/>
+          </a:prstGeom>
+        </p:spPr>
+        <p:txBody>
+          <a:bodyPr spcFirstLastPara="1" wrap="square" lIns="91425" tIns="91425" rIns="91425" bIns="91425" anchor="t" anchorCtr="0">
+            <a:noAutofit/>
+          </a:bodyPr>
+          <a:lstStyle/>
+          <a:p>
+            <a:pPr marL="0" lvl="0" indent="0" algn="just" rtl="0">
+              <a:lnSpc>
+                <a:spcPct val="115000"/>
+              </a:lnSpc>
+              <a:spcBef>
+                <a:spcPts val="0"/>
+              </a:spcBef>
+              <a:spcAft>
+                <a:spcPts val="0"/>
+              </a:spcAft>
+              <a:buNone/>
+            </a:pPr>
+            <a:r>
+              <a:rPr lang="en-US"/>
+              <a:t>Niher slide </a:t>
+            </a:r>
+            <a:endParaRPr/>
+          </a:p>
+          <a:p>
+            <a:pPr marL="0" lvl="0" indent="0" algn="just" rtl="0">
+              <a:lnSpc>
+                <a:spcPct val="115000"/>
+              </a:lnSpc>
+              <a:spcBef>
+                <a:spcPts val="700"/>
+              </a:spcBef>
+              <a:spcAft>
+                <a:spcPts val="0"/>
+              </a:spcAft>
+              <a:buClr>
+                <a:schemeClr val="dk1"/>
+              </a:buClr>
+              <a:buSzPts val="1100"/>
+              <a:buFont typeface="Arial"/>
+              <a:buNone/>
+            </a:pPr>
+            <a:r>
+              <a:rPr lang="en-US"/>
+              <a:t>mas “Monitoring is the active process of extracting signal from log data…” —&gt;such as detecting anomalies, triggering alerts, and surfacing patterns before they become incidents. In practice, most organizations store logs well but monitor them poorly.</a:t>
+            </a:r>
+            <a:endParaRPr/>
+          </a:p>
+          <a:p>
+            <a:pPr marL="0" lvl="0" indent="0" algn="l" rtl="0">
+              <a:spcBef>
+                <a:spcPts val="700"/>
+              </a:spcBef>
+              <a:spcAft>
+                <a:spcPts val="0"/>
+              </a:spcAft>
+              <a:buNone/>
+            </a:pPr>
+            <a:endParaRPr/>
+          </a:p>
+        </p:txBody>
+      </p:sp>
+      <p:sp>
+        <p:nvSpPr>
+          <p:cNvPr id="195" name="Google Shape;195;p8:notes"/>
+          <p:cNvSpPr>
+            <a:spLocks noGrp="1" noRot="1" noChangeAspect="1"/>
+          </p:cNvSpPr>
+          <p:nvPr>
+            <p:ph type="sldImg" idx="2"/>
+          </p:nvPr>
+        </p:nvSpPr>
+        <p:spPr>
+          <a:xfrm>
+            <a:off x="1143225" y="685800"/>
+            <a:ext cx="4572225" cy="3429000"/>
+          </a:xfrm>
+          <a:custGeom>
+            <a:avLst/>
+            <a:gdLst/>
+            <a:ahLst/>
+            <a:cxnLst/>
+            <a:rect l="l" t="t" r="r" b="b"/>
+            <a:pathLst>
+              <a:path w="120000" h="120000" extrusionOk="0">
+                <a:moveTo>
+                  <a:pt x="0" y="0"/>
+                </a:moveTo>
+                <a:lnTo>
+                  <a:pt x="120000" y="0"/>
+                </a:lnTo>
+                <a:lnTo>
+                  <a:pt x="120000" y="120000"/>
+                </a:lnTo>
+                <a:lnTo>
+                  <a:pt x="0" y="120000"/>
+                </a:lnTo>
+                <a:close/>
+              </a:path>
+            </a:pathLst>
+          </a:custGeom>
+        </p:spPr>
+      </p:sp>
+    </p:spTree>
+  </p:cSld>
+  <p:clrMapOvr>
+    <a:masterClrMapping/>
+  </p:clrMapOvr>
+</p:notes>
+</file>
+
+<file path=ppt/notesSlides/notesSlide11.xml><?xml version="1.0" encoding="utf-8"?>
+<p:notes xmlns:a="http://schemas.openxmlformats.org/drawingml/2006/main" xmlns:r="http://schemas.openxmlformats.org/officeDocument/2006/relationships" xmlns:p="http://schemas.openxmlformats.org/presentationml/2006/main" showMasterSp="0" showMasterPhAnim="0">
+  <p:cSld>
+    <p:spTree>
+      <p:nvGrpSpPr>
+        <p:cNvPr id="1" name="Shape 204"/>
+        <p:cNvGrpSpPr/>
+        <p:nvPr/>
+      </p:nvGrpSpPr>
+      <p:grpSpPr>
+        <a:xfrm>
+          <a:off x="0" y="0"/>
+          <a:ext cx="0" cy="0"/>
+          <a:chOff x="0" y="0"/>
+          <a:chExt cx="0" cy="0"/>
+        </a:xfrm>
+      </p:grpSpPr>
+      <p:sp>
+        <p:nvSpPr>
+          <p:cNvPr id="205" name="Google Shape;205;p9:notes"/>
+          <p:cNvSpPr txBox="1">
+            <a:spLocks noGrp="1"/>
+          </p:cNvSpPr>
+          <p:nvPr>
+            <p:ph type="body" idx="1"/>
+          </p:nvPr>
+        </p:nvSpPr>
+        <p:spPr>
+          <a:xfrm>
+            <a:off x="685800" y="4343400"/>
+            <a:ext cx="5486400" cy="4114800"/>
+          </a:xfrm>
+          <a:prstGeom prst="rect">
+            <a:avLst/>
+          </a:prstGeom>
+        </p:spPr>
+        <p:txBody>
+          <a:bodyPr spcFirstLastPara="1" wrap="square" lIns="91425" tIns="91425" rIns="91425" bIns="91425" anchor="t" anchorCtr="0">
+            <a:noAutofit/>
+          </a:bodyPr>
+          <a:lstStyle/>
+          <a:p>
+            <a:pPr marL="0" lvl="0" indent="0" algn="just" rtl="0">
+              <a:lnSpc>
+                <a:spcPct val="115000"/>
+              </a:lnSpc>
+              <a:spcBef>
+                <a:spcPts val="0"/>
+              </a:spcBef>
+              <a:spcAft>
+                <a:spcPts val="0"/>
+              </a:spcAft>
+              <a:buNone/>
+            </a:pPr>
+            <a:r>
+              <a:rPr lang="en-US"/>
+              <a:t>Niher notes</a:t>
+            </a:r>
+            <a:endParaRPr/>
+          </a:p>
+          <a:p>
+            <a:pPr marL="0" lvl="0" indent="0" algn="just" rtl="0">
+              <a:lnSpc>
+                <a:spcPct val="115000"/>
+              </a:lnSpc>
+              <a:spcBef>
+                <a:spcPts val="700"/>
+              </a:spcBef>
+              <a:spcAft>
+                <a:spcPts val="0"/>
+              </a:spcAft>
+              <a:buClr>
+                <a:schemeClr val="dk1"/>
+              </a:buClr>
+              <a:buSzPts val="1100"/>
+              <a:buFont typeface="Arial"/>
+              <a:buNone/>
+            </a:pPr>
+            <a:r>
+              <a:rPr lang="en-US"/>
+              <a:t>CloudWatch Metric Filters extract numeric signals from log text and publish them as custom CloudWatch metrics. This bridge between raw logs and the CloudWatch alarm system is one of the most underutilized features in AWS, and can help figure out what’s not working properly much faster.</a:t>
+            </a:r>
+            <a:endParaRPr/>
+          </a:p>
+          <a:p>
+            <a:pPr marL="0" lvl="0" indent="0" algn="l" rtl="0">
+              <a:spcBef>
+                <a:spcPts val="700"/>
+              </a:spcBef>
+              <a:spcAft>
+                <a:spcPts val="0"/>
+              </a:spcAft>
+              <a:buNone/>
+            </a:pPr>
+            <a:endParaRPr/>
+          </a:p>
+        </p:txBody>
+      </p:sp>
+      <p:sp>
+        <p:nvSpPr>
+          <p:cNvPr id="206" name="Google Shape;206;p9:notes"/>
+          <p:cNvSpPr>
+            <a:spLocks noGrp="1" noRot="1" noChangeAspect="1"/>
+          </p:cNvSpPr>
+          <p:nvPr>
+            <p:ph type="sldImg" idx="2"/>
+          </p:nvPr>
+        </p:nvSpPr>
+        <p:spPr>
+          <a:xfrm>
+            <a:off x="1143225" y="685800"/>
+            <a:ext cx="4572225" cy="3429000"/>
+          </a:xfrm>
+          <a:custGeom>
+            <a:avLst/>
+            <a:gdLst/>
+            <a:ahLst/>
+            <a:cxnLst/>
+            <a:rect l="l" t="t" r="r" b="b"/>
+            <a:pathLst>
+              <a:path w="120000" h="120000" extrusionOk="0">
+                <a:moveTo>
+                  <a:pt x="0" y="0"/>
+                </a:moveTo>
+                <a:lnTo>
+                  <a:pt x="120000" y="0"/>
+                </a:lnTo>
+                <a:lnTo>
+                  <a:pt x="120000" y="120000"/>
+                </a:lnTo>
+                <a:lnTo>
+                  <a:pt x="0" y="120000"/>
+                </a:lnTo>
+                <a:close/>
+              </a:path>
+            </a:pathLst>
+          </a:custGeom>
+        </p:spPr>
+      </p:sp>
+    </p:spTree>
+  </p:cSld>
+  <p:clrMapOvr>
+    <a:masterClrMapping/>
+  </p:clrMapOvr>
+</p:notes>
+</file>
+
+<file path=ppt/notesSlides/notesSlide12.xml><?xml version="1.0" encoding="utf-8"?>
+<p:notes xmlns:a="http://schemas.openxmlformats.org/drawingml/2006/main" xmlns:r="http://schemas.openxmlformats.org/officeDocument/2006/relationships" xmlns:p="http://schemas.openxmlformats.org/presentationml/2006/main" showMasterSp="0" showMasterPhAnim="0">
+  <p:cSld>
+    <p:spTree>
+      <p:nvGrpSpPr>
         <p:cNvPr id="1" name="Shape 219"/>
         <p:cNvGrpSpPr/>
         <p:nvPr/>
@@ -1111,7 +1407,7 @@
 </p:notes>
 </file>
 
-<file path=ppt/notesSlides/notesSlide11.xml><?xml version="1.0" encoding="utf-8"?>
+<file path=ppt/notesSlides/notesSlide13.xml><?xml version="1.0" encoding="utf-8"?>
 <p:notes xmlns:a="http://schemas.openxmlformats.org/drawingml/2006/main" xmlns:r="http://schemas.openxmlformats.org/officeDocument/2006/relationships" xmlns:p="http://schemas.openxmlformats.org/presentationml/2006/main" showMasterSp="0" showMasterPhAnim="0">
   <p:cSld>
     <p:spTree>
@@ -1255,7 +1551,7 @@
 </p:notes>
 </file>
 
-<file path=ppt/notesSlides/notesSlide12.xml><?xml version="1.0" encoding="utf-8"?>
+<file path=ppt/notesSlides/notesSlide14.xml><?xml version="1.0" encoding="utf-8"?>
 <p:notes xmlns:a="http://schemas.openxmlformats.org/drawingml/2006/main" xmlns:r="http://schemas.openxmlformats.org/officeDocument/2006/relationships" xmlns:p="http://schemas.openxmlformats.org/presentationml/2006/main" showMasterSp="0" showMasterPhAnim="0">
   <p:cSld>
     <p:spTree>
@@ -1634,56 +1930,9 @@
             <a:endParaRPr lang="en-US" dirty="0"/>
           </a:p>
           <a:p>
-            <a:r>
-              <a:rPr lang="en-US" b="1" dirty="0"/>
-              <a:t>1. Network Logs (Flow Logs)-</a:t>
-            </a:r>
-            <a:r>
-              <a:rPr lang="en-US" dirty="0"/>
-              <a:t>These record the IP traffic going to and from network interfaces. They are critical for security forensics and troubleshooting connectivity issues.</a:t>
-            </a:r>
-          </a:p>
-          <a:p>
-            <a:r>
-              <a:rPr lang="en-US" b="1" dirty="0"/>
-              <a:t>2. Application Logs - </a:t>
-            </a:r>
-            <a:r>
-              <a:rPr lang="en-US" dirty="0"/>
-              <a:t>Generated by the code or the runtime environment (e.g., Java, Python, Node.js). These are custom-defined by developers to track the internal health of an app.</a:t>
-            </a:r>
-          </a:p>
-          <a:p>
-            <a:r>
-              <a:rPr lang="en-US" b="1" dirty="0"/>
-              <a:t>3. Resource &amp; Service Logs-</a:t>
-            </a:r>
-            <a:r>
-              <a:rPr lang="en-US" dirty="0"/>
-              <a:t>These logs come from the cloud services themselves (managed databases, load balancers, etc.) and describe their internal operations rather than user actions.</a:t>
-            </a:r>
-          </a:p>
-          <a:p>
-            <a:r>
-              <a:rPr lang="en-US" b="1" dirty="0"/>
-              <a:t>4. System (OS-Level) Logs-</a:t>
-            </a:r>
-            <a:r>
-              <a:rPr lang="en-US" dirty="0"/>
-              <a:t>These are generated by the operating system (Linux/Windows) running on your Virtual Machines.</a:t>
-            </a:r>
-          </a:p>
-          <a:p>
-            <a:r>
-              <a:rPr lang="en-US" b="1" dirty="0"/>
-              <a:t>5. Access Logs-</a:t>
-            </a:r>
-            <a:r>
-              <a:rPr lang="en-US" dirty="0"/>
-              <a:t>Specific to storage and delivery services, these track every single request made to an object or a file.</a:t>
-            </a:r>
-          </a:p>
-          <a:p>
+            <a:pPr marL="158750" indent="0">
+              <a:buNone/>
+            </a:pPr>
             <a:endParaRPr lang="en-US" dirty="0"/>
           </a:p>
           <a:p>
@@ -1759,6 +2008,115 @@
 </file>
 
 <file path=ppt/notesSlides/notesSlide4.xml><?xml version="1.0" encoding="utf-8"?>
+<p:notes xmlns:a="http://schemas.openxmlformats.org/drawingml/2006/main" xmlns:r="http://schemas.openxmlformats.org/officeDocument/2006/relationships" xmlns:p="http://schemas.openxmlformats.org/presentationml/2006/main" showMasterSp="0" showMasterPhAnim="0">
+  <p:cSld>
+    <p:spTree>
+      <p:nvGrpSpPr>
+        <p:cNvPr id="1" name="Shape 107"/>
+        <p:cNvGrpSpPr/>
+        <p:nvPr/>
+      </p:nvGrpSpPr>
+      <p:grpSpPr>
+        <a:xfrm>
+          <a:off x="0" y="0"/>
+          <a:ext cx="0" cy="0"/>
+          <a:chOff x="0" y="0"/>
+          <a:chExt cx="0" cy="0"/>
+        </a:xfrm>
+      </p:grpSpPr>
+      <p:sp>
+        <p:nvSpPr>
+          <p:cNvPr id="108" name="Google Shape;108;p3:notes"/>
+          <p:cNvSpPr txBox="1">
+            <a:spLocks noGrp="1"/>
+          </p:cNvSpPr>
+          <p:nvPr>
+            <p:ph type="body" idx="1"/>
+          </p:nvPr>
+        </p:nvSpPr>
+        <p:spPr>
+          <a:xfrm>
+            <a:off x="685800" y="4343400"/>
+            <a:ext cx="5486400" cy="4114800"/>
+          </a:xfrm>
+          <a:prstGeom prst="rect">
+            <a:avLst/>
+          </a:prstGeom>
+        </p:spPr>
+        <p:txBody>
+          <a:bodyPr spcFirstLastPara="1" wrap="square" lIns="91425" tIns="91425" rIns="91425" bIns="91425" anchor="t" anchorCtr="0">
+            <a:noAutofit/>
+          </a:bodyPr>
+          <a:lstStyle/>
+          <a:p>
+            <a:pPr marL="0" lvl="0" indent="0" algn="l" rtl="0">
+              <a:spcBef>
+                <a:spcPts val="700"/>
+              </a:spcBef>
+              <a:spcAft>
+                <a:spcPts val="0"/>
+              </a:spcAft>
+              <a:buNone/>
+            </a:pPr>
+            <a:endParaRPr dirty="0"/>
+          </a:p>
+        </p:txBody>
+      </p:sp>
+      <p:sp>
+        <p:nvSpPr>
+          <p:cNvPr id="109" name="Google Shape;109;p3:notes"/>
+          <p:cNvSpPr>
+            <a:spLocks noGrp="1" noRot="1" noChangeAspect="1"/>
+          </p:cNvSpPr>
+          <p:nvPr>
+            <p:ph type="sldImg" idx="2"/>
+          </p:nvPr>
+        </p:nvSpPr>
+        <p:spPr>
+          <a:xfrm>
+            <a:off x="381000" y="685800"/>
+            <a:ext cx="6096000" cy="3429000"/>
+          </a:xfrm>
+          <a:custGeom>
+            <a:avLst/>
+            <a:gdLst/>
+            <a:ahLst/>
+            <a:cxnLst/>
+            <a:rect l="l" t="t" r="r" b="b"/>
+            <a:pathLst>
+              <a:path w="120000" h="120000" extrusionOk="0">
+                <a:moveTo>
+                  <a:pt x="0" y="0"/>
+                </a:moveTo>
+                <a:lnTo>
+                  <a:pt x="120000" y="0"/>
+                </a:lnTo>
+                <a:lnTo>
+                  <a:pt x="120000" y="120000"/>
+                </a:lnTo>
+                <a:lnTo>
+                  <a:pt x="0" y="120000"/>
+                </a:lnTo>
+                <a:close/>
+              </a:path>
+            </a:pathLst>
+          </a:custGeom>
+        </p:spPr>
+      </p:sp>
+    </p:spTree>
+    <p:extLst>
+      <p:ext uri="{BB962C8B-B14F-4D97-AF65-F5344CB8AC3E}">
+        <p14:creationId xmlns:p14="http://schemas.microsoft.com/office/powerpoint/2010/main" val="3686036241"/>
+      </p:ext>
+    </p:extLst>
+  </p:cSld>
+  <p:clrMapOvr>
+    <a:masterClrMapping/>
+  </p:clrMapOvr>
+</p:notes>
+</file>
+
+<file path=ppt/notesSlides/notesSlide5.xml><?xml version="1.0" encoding="utf-8"?>
 <p:notes xmlns:a="http://schemas.openxmlformats.org/drawingml/2006/main" xmlns:r="http://schemas.openxmlformats.org/officeDocument/2006/relationships" xmlns:p="http://schemas.openxmlformats.org/presentationml/2006/main" showMasterSp="0" showMasterPhAnim="0">
   <p:cSld>
     <p:spTree>
@@ -1862,7 +2220,7 @@
 </p:notes>
 </file>
 
-<file path=ppt/notesSlides/notesSlide5.xml><?xml version="1.0" encoding="utf-8"?>
+<file path=ppt/notesSlides/notesSlide6.xml><?xml version="1.0" encoding="utf-8"?>
 <p:notes xmlns:a="http://schemas.openxmlformats.org/drawingml/2006/main" xmlns:r="http://schemas.openxmlformats.org/officeDocument/2006/relationships" xmlns:p="http://schemas.openxmlformats.org/presentationml/2006/main" showMasterSp="0" showMasterPhAnim="0">
   <p:cSld>
     <p:spTree>
@@ -2073,7 +2431,223 @@
 </p:notes>
 </file>
 
-<file path=ppt/notesSlides/notesSlide6.xml><?xml version="1.0" encoding="utf-8"?>
+<file path=ppt/notesSlides/notesSlide7.xml><?xml version="1.0" encoding="utf-8"?>
+<p:notes xmlns:a="http://schemas.openxmlformats.org/drawingml/2006/main" xmlns:r="http://schemas.openxmlformats.org/officeDocument/2006/relationships" xmlns:p="http://schemas.openxmlformats.org/presentationml/2006/main" showMasterSp="0" showMasterPhAnim="0">
+  <p:cSld>
+    <p:spTree>
+      <p:nvGrpSpPr>
+        <p:cNvPr id="1" name="Shape 142"/>
+        <p:cNvGrpSpPr/>
+        <p:nvPr/>
+      </p:nvGrpSpPr>
+      <p:grpSpPr>
+        <a:xfrm>
+          <a:off x="0" y="0"/>
+          <a:ext cx="0" cy="0"/>
+          <a:chOff x="0" y="0"/>
+          <a:chExt cx="0" cy="0"/>
+        </a:xfrm>
+      </p:grpSpPr>
+      <p:sp>
+        <p:nvSpPr>
+          <p:cNvPr id="143" name="Google Shape;143;p5:notes"/>
+          <p:cNvSpPr txBox="1">
+            <a:spLocks noGrp="1"/>
+          </p:cNvSpPr>
+          <p:nvPr>
+            <p:ph type="body" idx="1"/>
+          </p:nvPr>
+        </p:nvSpPr>
+        <p:spPr>
+          <a:xfrm>
+            <a:off x="685800" y="4343400"/>
+            <a:ext cx="5486400" cy="4114800"/>
+          </a:xfrm>
+          <a:prstGeom prst="rect">
+            <a:avLst/>
+          </a:prstGeom>
+        </p:spPr>
+        <p:txBody>
+          <a:bodyPr spcFirstLastPara="1" wrap="square" lIns="91425" tIns="91425" rIns="91425" bIns="91425" anchor="t" anchorCtr="0">
+            <a:noAutofit/>
+          </a:bodyPr>
+          <a:lstStyle/>
+          <a:p>
+            <a:pPr marL="0" lvl="0" indent="0" algn="just" rtl="0">
+              <a:lnSpc>
+                <a:spcPct val="115000"/>
+              </a:lnSpc>
+              <a:spcBef>
+                <a:spcPts val="0"/>
+              </a:spcBef>
+              <a:spcAft>
+                <a:spcPts val="0"/>
+              </a:spcAft>
+              <a:buNone/>
+            </a:pPr>
+            <a:r>
+              <a:rPr lang="en-US"/>
+              <a:t>Niher notes</a:t>
+            </a:r>
+            <a:endParaRPr/>
+          </a:p>
+          <a:p>
+            <a:pPr marL="0" lvl="0" indent="0" algn="just" rtl="0">
+              <a:lnSpc>
+                <a:spcPct val="115000"/>
+              </a:lnSpc>
+              <a:spcBef>
+                <a:spcPts val="700"/>
+              </a:spcBef>
+              <a:spcAft>
+                <a:spcPts val="0"/>
+              </a:spcAft>
+              <a:buNone/>
+            </a:pPr>
+            <a:r>
+              <a:rPr lang="en-US"/>
+              <a:t>The most common log management failure is the absence of structure. Teams enable every log source available, ship everything to one undifferentiated destination, and end up with an expensive stack from which they cannot extract concrete findings.</a:t>
+            </a:r>
+            <a:endParaRPr/>
+          </a:p>
+          <a:p>
+            <a:pPr marL="0" lvl="0" indent="0" algn="just" rtl="0">
+              <a:lnSpc>
+                <a:spcPct val="115000"/>
+              </a:lnSpc>
+              <a:spcBef>
+                <a:spcPts val="700"/>
+              </a:spcBef>
+              <a:spcAft>
+                <a:spcPts val="0"/>
+              </a:spcAft>
+              <a:buNone/>
+            </a:pPr>
+            <a:r>
+              <a:rPr lang="en-US"/>
+              <a:t>A practical organizational model divides logs into three tiers based on their sensitivity, query frequency, and retention needs such as^^^^^^</a:t>
+            </a:r>
+            <a:endParaRPr/>
+          </a:p>
+          <a:p>
+            <a:pPr marL="0" lvl="0" indent="0" algn="just" rtl="0">
+              <a:lnSpc>
+                <a:spcPct val="115000"/>
+              </a:lnSpc>
+              <a:spcBef>
+                <a:spcPts val="700"/>
+              </a:spcBef>
+              <a:spcAft>
+                <a:spcPts val="0"/>
+              </a:spcAft>
+              <a:buNone/>
+            </a:pPr>
+            <a:endParaRPr/>
+          </a:p>
+          <a:p>
+            <a:pPr marL="0" lvl="0" indent="0" algn="just" rtl="0">
+              <a:lnSpc>
+                <a:spcPct val="115000"/>
+              </a:lnSpc>
+              <a:spcBef>
+                <a:spcPts val="700"/>
+              </a:spcBef>
+              <a:spcAft>
+                <a:spcPts val="0"/>
+              </a:spcAft>
+              <a:buNone/>
+            </a:pPr>
+            <a:endParaRPr/>
+          </a:p>
+          <a:p>
+            <a:pPr marL="0" lvl="0" indent="0" algn="just" rtl="0">
+              <a:lnSpc>
+                <a:spcPct val="115000"/>
+              </a:lnSpc>
+              <a:spcBef>
+                <a:spcPts val="700"/>
+              </a:spcBef>
+              <a:spcAft>
+                <a:spcPts val="0"/>
+              </a:spcAft>
+              <a:buClr>
+                <a:schemeClr val="dk1"/>
+              </a:buClr>
+              <a:buSzPts val="1100"/>
+              <a:buFont typeface="Arial"/>
+              <a:buNone/>
+            </a:pPr>
+            <a:endParaRPr/>
+          </a:p>
+          <a:p>
+            <a:pPr marL="0" lvl="0" indent="0" algn="l" rtl="0">
+              <a:spcBef>
+                <a:spcPts val="700"/>
+              </a:spcBef>
+              <a:spcAft>
+                <a:spcPts val="0"/>
+              </a:spcAft>
+              <a:buNone/>
+            </a:pPr>
+            <a:endParaRPr/>
+          </a:p>
+        </p:txBody>
+      </p:sp>
+      <p:sp>
+        <p:nvSpPr>
+          <p:cNvPr id="144" name="Google Shape;144;p5:notes"/>
+          <p:cNvSpPr>
+            <a:spLocks noGrp="1" noRot="1" noChangeAspect="1"/>
+          </p:cNvSpPr>
+          <p:nvPr>
+            <p:ph type="sldImg" idx="2"/>
+          </p:nvPr>
+        </p:nvSpPr>
+        <p:spPr>
+          <a:xfrm>
+            <a:off x="381000" y="685800"/>
+            <a:ext cx="6096000" cy="3429000"/>
+          </a:xfrm>
+          <a:custGeom>
+            <a:avLst/>
+            <a:gdLst/>
+            <a:ahLst/>
+            <a:cxnLst/>
+            <a:rect l="l" t="t" r="r" b="b"/>
+            <a:pathLst>
+              <a:path w="120000" h="120000" extrusionOk="0">
+                <a:moveTo>
+                  <a:pt x="0" y="0"/>
+                </a:moveTo>
+                <a:lnTo>
+                  <a:pt x="120000" y="0"/>
+                </a:lnTo>
+                <a:lnTo>
+                  <a:pt x="120000" y="120000"/>
+                </a:lnTo>
+                <a:lnTo>
+                  <a:pt x="0" y="120000"/>
+                </a:lnTo>
+                <a:close/>
+              </a:path>
+            </a:pathLst>
+          </a:custGeom>
+        </p:spPr>
+      </p:sp>
+    </p:spTree>
+    <p:extLst>
+      <p:ext uri="{BB962C8B-B14F-4D97-AF65-F5344CB8AC3E}">
+        <p14:creationId xmlns:p14="http://schemas.microsoft.com/office/powerpoint/2010/main" val="162329136"/>
+      </p:ext>
+    </p:extLst>
+  </p:cSld>
+  <p:clrMapOvr>
+    <a:masterClrMapping/>
+  </p:clrMapOvr>
+</p:notes>
+</file>
+
+<file path=ppt/notesSlides/notesSlide8.xml><?xml version="1.0" encoding="utf-8"?>
 <p:notes xmlns:a="http://schemas.openxmlformats.org/drawingml/2006/main" xmlns:r="http://schemas.openxmlformats.org/officeDocument/2006/relationships" xmlns:p="http://schemas.openxmlformats.org/presentationml/2006/main" showMasterSp="0" showMasterPhAnim="0">
   <p:cSld>
     <p:spTree>
@@ -2208,7 +2782,7 @@
 </p:notes>
 </file>
 
-<file path=ppt/notesSlides/notesSlide7.xml><?xml version="1.0" encoding="utf-8"?>
+<file path=ppt/notesSlides/notesSlide9.xml><?xml version="1.0" encoding="utf-8"?>
 <p:notes xmlns:a="http://schemas.openxmlformats.org/drawingml/2006/main" xmlns:r="http://schemas.openxmlformats.org/officeDocument/2006/relationships" xmlns:p="http://schemas.openxmlformats.org/presentationml/2006/main" showMasterSp="0" showMasterPhAnim="0">
   <p:cSld>
     <p:spTree>
@@ -2277,300 +2851,6 @@
           <a:xfrm>
             <a:off x="381000" y="685800"/>
             <a:ext cx="6096000" cy="3429000"/>
-          </a:xfrm>
-          <a:custGeom>
-            <a:avLst/>
-            <a:gdLst/>
-            <a:ahLst/>
-            <a:cxnLst/>
-            <a:rect l="l" t="t" r="r" b="b"/>
-            <a:pathLst>
-              <a:path w="120000" h="120000" extrusionOk="0">
-                <a:moveTo>
-                  <a:pt x="0" y="0"/>
-                </a:moveTo>
-                <a:lnTo>
-                  <a:pt x="120000" y="0"/>
-                </a:lnTo>
-                <a:lnTo>
-                  <a:pt x="120000" y="120000"/>
-                </a:lnTo>
-                <a:lnTo>
-                  <a:pt x="0" y="120000"/>
-                </a:lnTo>
-                <a:close/>
-              </a:path>
-            </a:pathLst>
-          </a:custGeom>
-        </p:spPr>
-      </p:sp>
-    </p:spTree>
-  </p:cSld>
-  <p:clrMapOvr>
-    <a:masterClrMapping/>
-  </p:clrMapOvr>
-</p:notes>
-</file>
-
-<file path=ppt/notesSlides/notesSlide8.xml><?xml version="1.0" encoding="utf-8"?>
-<p:notes xmlns:a="http://schemas.openxmlformats.org/drawingml/2006/main" xmlns:r="http://schemas.openxmlformats.org/officeDocument/2006/relationships" xmlns:p="http://schemas.openxmlformats.org/presentationml/2006/main" showMasterSp="0" showMasterPhAnim="0">
-  <p:cSld>
-    <p:spTree>
-      <p:nvGrpSpPr>
-        <p:cNvPr id="1" name="Shape 193"/>
-        <p:cNvGrpSpPr/>
-        <p:nvPr/>
-      </p:nvGrpSpPr>
-      <p:grpSpPr>
-        <a:xfrm>
-          <a:off x="0" y="0"/>
-          <a:ext cx="0" cy="0"/>
-          <a:chOff x="0" y="0"/>
-          <a:chExt cx="0" cy="0"/>
-        </a:xfrm>
-      </p:grpSpPr>
-      <p:sp>
-        <p:nvSpPr>
-          <p:cNvPr id="194" name="Google Shape;194;p8:notes"/>
-          <p:cNvSpPr txBox="1">
-            <a:spLocks noGrp="1"/>
-          </p:cNvSpPr>
-          <p:nvPr>
-            <p:ph type="body" idx="1"/>
-          </p:nvPr>
-        </p:nvSpPr>
-        <p:spPr>
-          <a:xfrm>
-            <a:off x="685800" y="4343400"/>
-            <a:ext cx="5486400" cy="4114800"/>
-          </a:xfrm>
-          <a:prstGeom prst="rect">
-            <a:avLst/>
-          </a:prstGeom>
-        </p:spPr>
-        <p:txBody>
-          <a:bodyPr spcFirstLastPara="1" wrap="square" lIns="91425" tIns="91425" rIns="91425" bIns="91425" anchor="t" anchorCtr="0">
-            <a:noAutofit/>
-          </a:bodyPr>
-          <a:lstStyle/>
-          <a:p>
-            <a:pPr marL="0" lvl="0" indent="0" algn="just" rtl="0">
-              <a:lnSpc>
-                <a:spcPct val="115000"/>
-              </a:lnSpc>
-              <a:spcBef>
-                <a:spcPts val="0"/>
-              </a:spcBef>
-              <a:spcAft>
-                <a:spcPts val="0"/>
-              </a:spcAft>
-              <a:buNone/>
-            </a:pPr>
-            <a:r>
-              <a:rPr lang="en-US"/>
-              <a:t>Niher slide </a:t>
-            </a:r>
-            <a:endParaRPr/>
-          </a:p>
-          <a:p>
-            <a:pPr marL="0" lvl="0" indent="0" algn="just" rtl="0">
-              <a:lnSpc>
-                <a:spcPct val="115000"/>
-              </a:lnSpc>
-              <a:spcBef>
-                <a:spcPts val="700"/>
-              </a:spcBef>
-              <a:spcAft>
-                <a:spcPts val="0"/>
-              </a:spcAft>
-              <a:buClr>
-                <a:schemeClr val="dk1"/>
-              </a:buClr>
-              <a:buSzPts val="1100"/>
-              <a:buFont typeface="Arial"/>
-              <a:buNone/>
-            </a:pPr>
-            <a:r>
-              <a:rPr lang="en-US"/>
-              <a:t>mas “Monitoring is the active process of extracting signal from log data…” —&gt;such as detecting anomalies, triggering alerts, and surfacing patterns before they become incidents. In practice, most organizations store logs well but monitor them poorly.</a:t>
-            </a:r>
-            <a:endParaRPr/>
-          </a:p>
-          <a:p>
-            <a:pPr marL="0" lvl="0" indent="0" algn="l" rtl="0">
-              <a:spcBef>
-                <a:spcPts val="700"/>
-              </a:spcBef>
-              <a:spcAft>
-                <a:spcPts val="0"/>
-              </a:spcAft>
-              <a:buNone/>
-            </a:pPr>
-            <a:endParaRPr/>
-          </a:p>
-        </p:txBody>
-      </p:sp>
-      <p:sp>
-        <p:nvSpPr>
-          <p:cNvPr id="195" name="Google Shape;195;p8:notes"/>
-          <p:cNvSpPr>
-            <a:spLocks noGrp="1" noRot="1" noChangeAspect="1"/>
-          </p:cNvSpPr>
-          <p:nvPr>
-            <p:ph type="sldImg" idx="2"/>
-          </p:nvPr>
-        </p:nvSpPr>
-        <p:spPr>
-          <a:xfrm>
-            <a:off x="1143225" y="685800"/>
-            <a:ext cx="4572225" cy="3429000"/>
-          </a:xfrm>
-          <a:custGeom>
-            <a:avLst/>
-            <a:gdLst/>
-            <a:ahLst/>
-            <a:cxnLst/>
-            <a:rect l="l" t="t" r="r" b="b"/>
-            <a:pathLst>
-              <a:path w="120000" h="120000" extrusionOk="0">
-                <a:moveTo>
-                  <a:pt x="0" y="0"/>
-                </a:moveTo>
-                <a:lnTo>
-                  <a:pt x="120000" y="0"/>
-                </a:lnTo>
-                <a:lnTo>
-                  <a:pt x="120000" y="120000"/>
-                </a:lnTo>
-                <a:lnTo>
-                  <a:pt x="0" y="120000"/>
-                </a:lnTo>
-                <a:close/>
-              </a:path>
-            </a:pathLst>
-          </a:custGeom>
-        </p:spPr>
-      </p:sp>
-    </p:spTree>
-  </p:cSld>
-  <p:clrMapOvr>
-    <a:masterClrMapping/>
-  </p:clrMapOvr>
-</p:notes>
-</file>
-
-<file path=ppt/notesSlides/notesSlide9.xml><?xml version="1.0" encoding="utf-8"?>
-<p:notes xmlns:a="http://schemas.openxmlformats.org/drawingml/2006/main" xmlns:r="http://schemas.openxmlformats.org/officeDocument/2006/relationships" xmlns:p="http://schemas.openxmlformats.org/presentationml/2006/main" showMasterSp="0" showMasterPhAnim="0">
-  <p:cSld>
-    <p:spTree>
-      <p:nvGrpSpPr>
-        <p:cNvPr id="1" name="Shape 204"/>
-        <p:cNvGrpSpPr/>
-        <p:nvPr/>
-      </p:nvGrpSpPr>
-      <p:grpSpPr>
-        <a:xfrm>
-          <a:off x="0" y="0"/>
-          <a:ext cx="0" cy="0"/>
-          <a:chOff x="0" y="0"/>
-          <a:chExt cx="0" cy="0"/>
-        </a:xfrm>
-      </p:grpSpPr>
-      <p:sp>
-        <p:nvSpPr>
-          <p:cNvPr id="205" name="Google Shape;205;p9:notes"/>
-          <p:cNvSpPr txBox="1">
-            <a:spLocks noGrp="1"/>
-          </p:cNvSpPr>
-          <p:nvPr>
-            <p:ph type="body" idx="1"/>
-          </p:nvPr>
-        </p:nvSpPr>
-        <p:spPr>
-          <a:xfrm>
-            <a:off x="685800" y="4343400"/>
-            <a:ext cx="5486400" cy="4114800"/>
-          </a:xfrm>
-          <a:prstGeom prst="rect">
-            <a:avLst/>
-          </a:prstGeom>
-        </p:spPr>
-        <p:txBody>
-          <a:bodyPr spcFirstLastPara="1" wrap="square" lIns="91425" tIns="91425" rIns="91425" bIns="91425" anchor="t" anchorCtr="0">
-            <a:noAutofit/>
-          </a:bodyPr>
-          <a:lstStyle/>
-          <a:p>
-            <a:pPr marL="0" lvl="0" indent="0" algn="just" rtl="0">
-              <a:lnSpc>
-                <a:spcPct val="115000"/>
-              </a:lnSpc>
-              <a:spcBef>
-                <a:spcPts val="0"/>
-              </a:spcBef>
-              <a:spcAft>
-                <a:spcPts val="0"/>
-              </a:spcAft>
-              <a:buNone/>
-            </a:pPr>
-            <a:r>
-              <a:rPr lang="en-US"/>
-              <a:t>Niher notes</a:t>
-            </a:r>
-            <a:endParaRPr/>
-          </a:p>
-          <a:p>
-            <a:pPr marL="0" lvl="0" indent="0" algn="just" rtl="0">
-              <a:lnSpc>
-                <a:spcPct val="115000"/>
-              </a:lnSpc>
-              <a:spcBef>
-                <a:spcPts val="700"/>
-              </a:spcBef>
-              <a:spcAft>
-                <a:spcPts val="0"/>
-              </a:spcAft>
-              <a:buClr>
-                <a:schemeClr val="dk1"/>
-              </a:buClr>
-              <a:buSzPts val="1100"/>
-              <a:buFont typeface="Arial"/>
-              <a:buNone/>
-            </a:pPr>
-            <a:r>
-              <a:rPr lang="en-US"/>
-              <a:t>CloudWatch Metric Filters extract numeric signals from log text and publish them as custom CloudWatch metrics. This bridge between raw logs and the CloudWatch alarm system is one of the most underutilized features in AWS, and can help figure out what’s not working properly much faster.</a:t>
-            </a:r>
-            <a:endParaRPr/>
-          </a:p>
-          <a:p>
-            <a:pPr marL="0" lvl="0" indent="0" algn="l" rtl="0">
-              <a:spcBef>
-                <a:spcPts val="700"/>
-              </a:spcBef>
-              <a:spcAft>
-                <a:spcPts val="0"/>
-              </a:spcAft>
-              <a:buNone/>
-            </a:pPr>
-            <a:endParaRPr/>
-          </a:p>
-        </p:txBody>
-      </p:sp>
-      <p:sp>
-        <p:nvSpPr>
-          <p:cNvPr id="206" name="Google Shape;206;p9:notes"/>
-          <p:cNvSpPr>
-            <a:spLocks noGrp="1" noRot="1" noChangeAspect="1"/>
-          </p:cNvSpPr>
-          <p:nvPr>
-            <p:ph type="sldImg" idx="2"/>
-          </p:nvPr>
-        </p:nvSpPr>
-        <p:spPr>
-          <a:xfrm>
-            <a:off x="1143225" y="685800"/>
-            <a:ext cx="4572225" cy="3429000"/>
           </a:xfrm>
           <a:custGeom>
             <a:avLst/>
@@ -12738,6 +13018,874 @@
     </p:bg>
     <p:spTree>
       <p:nvGrpSpPr>
+        <p:cNvPr id="1" name="Shape 196"/>
+        <p:cNvGrpSpPr/>
+        <p:nvPr/>
+      </p:nvGrpSpPr>
+      <p:grpSpPr>
+        <a:xfrm>
+          <a:off x="0" y="0"/>
+          <a:ext cx="0" cy="0"/>
+          <a:chOff x="0" y="0"/>
+          <a:chExt cx="0" cy="0"/>
+        </a:xfrm>
+      </p:grpSpPr>
+      <p:pic>
+        <p:nvPicPr>
+          <p:cNvPr id="197" name="Google Shape;197;p20" descr="image.png"/>
+          <p:cNvPicPr preferRelativeResize="0"/>
+          <p:nvPr/>
+        </p:nvPicPr>
+        <p:blipFill rotWithShape="1">
+          <a:blip r:embed="rId3">
+            <a:alphaModFix/>
+          </a:blip>
+          <a:srcRect/>
+          <a:stretch/>
+        </p:blipFill>
+        <p:spPr>
+          <a:xfrm>
+            <a:off x="0" y="0"/>
+            <a:ext cx="12192000" cy="6858000"/>
+          </a:xfrm>
+          <a:prstGeom prst="rect">
+            <a:avLst/>
+          </a:prstGeom>
+          <a:noFill/>
+          <a:ln>
+            <a:noFill/>
+          </a:ln>
+        </p:spPr>
+      </p:pic>
+      <p:pic>
+        <p:nvPicPr>
+          <p:cNvPr id="198" name="Google Shape;198;p20" descr="image.png"/>
+          <p:cNvPicPr preferRelativeResize="0"/>
+          <p:nvPr/>
+        </p:nvPicPr>
+        <p:blipFill rotWithShape="1">
+          <a:blip r:embed="rId4">
+            <a:alphaModFix/>
+          </a:blip>
+          <a:srcRect/>
+          <a:stretch/>
+        </p:blipFill>
+        <p:spPr>
+          <a:xfrm>
+            <a:off x="6286500" y="1985962"/>
+            <a:ext cx="5334000" cy="3810000"/>
+          </a:xfrm>
+          <a:prstGeom prst="rect">
+            <a:avLst/>
+          </a:prstGeom>
+          <a:noFill/>
+          <a:ln>
+            <a:noFill/>
+          </a:ln>
+        </p:spPr>
+      </p:pic>
+      <p:sp>
+        <p:nvSpPr>
+          <p:cNvPr id="199" name="Google Shape;199;p20"/>
+          <p:cNvSpPr txBox="1"/>
+          <p:nvPr/>
+        </p:nvSpPr>
+        <p:spPr>
+          <a:xfrm>
+            <a:off x="571500" y="3214687"/>
+            <a:ext cx="5334000" cy="533400"/>
+          </a:xfrm>
+          <a:prstGeom prst="rect">
+            <a:avLst/>
+          </a:prstGeom>
+          <a:noFill/>
+          <a:ln>
+            <a:noFill/>
+          </a:ln>
+        </p:spPr>
+        <p:txBody>
+          <a:bodyPr spcFirstLastPara="1" wrap="square" lIns="0" tIns="0" rIns="0" bIns="0" anchor="t" anchorCtr="0">
+            <a:spAutoFit/>
+          </a:bodyPr>
+          <a:lstStyle/>
+          <a:p>
+            <a:pPr marL="0" marR="0" lvl="0" indent="0" algn="l" rtl="0">
+              <a:lnSpc>
+                <a:spcPct val="140000"/>
+              </a:lnSpc>
+              <a:spcBef>
+                <a:spcPts val="0"/>
+              </a:spcBef>
+              <a:spcAft>
+                <a:spcPts val="0"/>
+              </a:spcAft>
+              <a:buNone/>
+            </a:pPr>
+            <a:r>
+              <a:rPr lang="en-US" sz="1500" b="0" i="0" u="none" strike="noStrike" cap="none">
+                <a:solidFill>
+                  <a:srgbClr val="444444"/>
+                </a:solidFill>
+                <a:latin typeface="Lato"/>
+                <a:ea typeface="Lato"/>
+                <a:cs typeface="Lato"/>
+                <a:sym typeface="Lato"/>
+              </a:rPr>
+              <a:t>Storing logs is not monitoring. Monitoring is the active process of extracting signal from raw data.</a:t>
+            </a:r>
+            <a:endParaRPr/>
+          </a:p>
+        </p:txBody>
+      </p:sp>
+      <p:sp>
+        <p:nvSpPr>
+          <p:cNvPr id="200" name="Google Shape;200;p20"/>
+          <p:cNvSpPr txBox="1"/>
+          <p:nvPr/>
+        </p:nvSpPr>
+        <p:spPr>
+          <a:xfrm>
+            <a:off x="571500" y="3890962"/>
+            <a:ext cx="5334000" cy="533400"/>
+          </a:xfrm>
+          <a:prstGeom prst="rect">
+            <a:avLst/>
+          </a:prstGeom>
+          <a:noFill/>
+          <a:ln>
+            <a:noFill/>
+          </a:ln>
+        </p:spPr>
+        <p:txBody>
+          <a:bodyPr spcFirstLastPara="1" wrap="square" lIns="0" tIns="0" rIns="0" bIns="0" anchor="t" anchorCtr="0">
+            <a:spAutoFit/>
+          </a:bodyPr>
+          <a:lstStyle/>
+          <a:p>
+            <a:pPr marL="0" marR="0" lvl="0" indent="0" algn="l" rtl="0">
+              <a:lnSpc>
+                <a:spcPct val="140000"/>
+              </a:lnSpc>
+              <a:spcBef>
+                <a:spcPts val="0"/>
+              </a:spcBef>
+              <a:spcAft>
+                <a:spcPts val="0"/>
+              </a:spcAft>
+              <a:buNone/>
+            </a:pPr>
+            <a:r>
+              <a:rPr lang="en-US" sz="1500" b="0" i="0" u="none" strike="noStrike" cap="none">
+                <a:solidFill>
+                  <a:srgbClr val="444444"/>
+                </a:solidFill>
+                <a:latin typeface="Lato"/>
+                <a:ea typeface="Lato"/>
+                <a:cs typeface="Lato"/>
+                <a:sym typeface="Lato"/>
+              </a:rPr>
+              <a:t>Avoid </a:t>
+            </a:r>
+            <a:r>
+              <a:rPr lang="en-US" sz="1500" b="1" i="0" u="none" strike="noStrike" cap="none">
+                <a:solidFill>
+                  <a:srgbClr val="444444"/>
+                </a:solidFill>
+                <a:latin typeface="Lato"/>
+                <a:ea typeface="Lato"/>
+                <a:cs typeface="Lato"/>
+                <a:sym typeface="Lato"/>
+              </a:rPr>
+              <a:t>Silent Failures</a:t>
+            </a:r>
+            <a:r>
+              <a:rPr lang="en-US" sz="1500" b="0" i="0" u="none" strike="noStrike" cap="none">
+                <a:solidFill>
+                  <a:srgbClr val="444444"/>
+                </a:solidFill>
+                <a:latin typeface="Lato"/>
+                <a:ea typeface="Lato"/>
+                <a:cs typeface="Lato"/>
+                <a:sym typeface="Lato"/>
+              </a:rPr>
+              <a:t>: Users might report "broken" features for weeks before a bug is found if alerts only track CPU/Memory.</a:t>
+            </a:r>
+            <a:endParaRPr/>
+          </a:p>
+        </p:txBody>
+      </p:sp>
+      <p:pic>
+        <p:nvPicPr>
+          <p:cNvPr id="201" name="Google Shape;201;p20" descr="image.png"/>
+          <p:cNvPicPr preferRelativeResize="0"/>
+          <p:nvPr/>
+        </p:nvPicPr>
+        <p:blipFill rotWithShape="1">
+          <a:blip r:embed="rId5">
+            <a:alphaModFix/>
+          </a:blip>
+          <a:srcRect/>
+          <a:stretch/>
+        </p:blipFill>
+        <p:spPr>
+          <a:xfrm>
+            <a:off x="7239000" y="2176462"/>
+            <a:ext cx="3429000" cy="3429000"/>
+          </a:xfrm>
+          <a:prstGeom prst="rect">
+            <a:avLst/>
+          </a:prstGeom>
+          <a:noFill/>
+          <a:ln>
+            <a:noFill/>
+          </a:ln>
+        </p:spPr>
+      </p:pic>
+      <p:sp>
+        <p:nvSpPr>
+          <p:cNvPr id="202" name="Google Shape;202;p20"/>
+          <p:cNvSpPr txBox="1"/>
+          <p:nvPr/>
+        </p:nvSpPr>
+        <p:spPr>
+          <a:xfrm>
+            <a:off x="762000" y="571500"/>
+            <a:ext cx="11401425" cy="542925"/>
+          </a:xfrm>
+          <a:prstGeom prst="rect">
+            <a:avLst/>
+          </a:prstGeom>
+          <a:noFill/>
+          <a:ln>
+            <a:noFill/>
+          </a:ln>
+        </p:spPr>
+        <p:txBody>
+          <a:bodyPr spcFirstLastPara="1" wrap="square" lIns="0" tIns="0" rIns="0" bIns="0" anchor="t" anchorCtr="0">
+            <a:spAutoFit/>
+          </a:bodyPr>
+          <a:lstStyle/>
+          <a:p>
+            <a:pPr marL="0" marR="0" lvl="0" indent="0" algn="l" rtl="0">
+              <a:spcBef>
+                <a:spcPts val="0"/>
+              </a:spcBef>
+              <a:spcAft>
+                <a:spcPts val="0"/>
+              </a:spcAft>
+              <a:buNone/>
+            </a:pPr>
+            <a:r>
+              <a:rPr lang="en-US" sz="2850" b="1" i="0" u="none" strike="noStrike" cap="none">
+                <a:solidFill>
+                  <a:srgbClr val="232F3E"/>
+                </a:solidFill>
+                <a:latin typeface="Poppins"/>
+                <a:ea typeface="Poppins"/>
+                <a:cs typeface="Poppins"/>
+                <a:sym typeface="Poppins"/>
+              </a:rPr>
+              <a:t>Monitoring: Data to Signal</a:t>
+            </a:r>
+            <a:endParaRPr/>
+          </a:p>
+        </p:txBody>
+      </p:sp>
+      <p:sp>
+        <p:nvSpPr>
+          <p:cNvPr id="203" name="Google Shape;203;p20"/>
+          <p:cNvSpPr/>
+          <p:nvPr/>
+        </p:nvSpPr>
+        <p:spPr>
+          <a:xfrm>
+            <a:off x="571500" y="571500"/>
+            <a:ext cx="57150" cy="542925"/>
+          </a:xfrm>
+          <a:prstGeom prst="rect">
+            <a:avLst/>
+          </a:prstGeom>
+          <a:solidFill>
+            <a:srgbClr val="FF9900"/>
+          </a:solidFill>
+          <a:ln>
+            <a:noFill/>
+          </a:ln>
+        </p:spPr>
+        <p:txBody>
+          <a:bodyPr spcFirstLastPara="1" wrap="square" lIns="91425" tIns="45700" rIns="91425" bIns="45700" anchor="ctr" anchorCtr="0">
+            <a:noAutofit/>
+          </a:bodyPr>
+          <a:lstStyle/>
+          <a:p>
+            <a:pPr marL="0" marR="0" lvl="0" indent="0" algn="ctr" rtl="0">
+              <a:spcBef>
+                <a:spcPts val="0"/>
+              </a:spcBef>
+              <a:spcAft>
+                <a:spcPts val="0"/>
+              </a:spcAft>
+              <a:buNone/>
+            </a:pPr>
+            <a:endParaRPr sz="1800" b="0" i="0" u="none" strike="noStrike" cap="none">
+              <a:solidFill>
+                <a:schemeClr val="dk1"/>
+              </a:solidFill>
+              <a:latin typeface="Calibri"/>
+              <a:ea typeface="Calibri"/>
+              <a:cs typeface="Calibri"/>
+              <a:sym typeface="Calibri"/>
+            </a:endParaRPr>
+          </a:p>
+        </p:txBody>
+      </p:sp>
+    </p:spTree>
+  </p:cSld>
+  <p:clrMapOvr>
+    <a:masterClrMapping/>
+  </p:clrMapOvr>
+</p:sld>
+</file>
+
+<file path=ppt/slides/slide11.xml><?xml version="1.0" encoding="utf-8"?>
+<p:sld xmlns:a="http://schemas.openxmlformats.org/drawingml/2006/main" xmlns:r="http://schemas.openxmlformats.org/officeDocument/2006/relationships" xmlns:p="http://schemas.openxmlformats.org/presentationml/2006/main">
+  <p:cSld>
+    <p:bg>
+      <p:bgPr>
+        <a:solidFill>
+          <a:srgbClr val="FFFFFF"/>
+        </a:solidFill>
+        <a:effectLst/>
+      </p:bgPr>
+    </p:bg>
+    <p:spTree>
+      <p:nvGrpSpPr>
+        <p:cNvPr id="1" name="Shape 207"/>
+        <p:cNvGrpSpPr/>
+        <p:nvPr/>
+      </p:nvGrpSpPr>
+      <p:grpSpPr>
+        <a:xfrm>
+          <a:off x="0" y="0"/>
+          <a:ext cx="0" cy="0"/>
+          <a:chOff x="0" y="0"/>
+          <a:chExt cx="0" cy="0"/>
+        </a:xfrm>
+      </p:grpSpPr>
+      <p:pic>
+        <p:nvPicPr>
+          <p:cNvPr id="208" name="Google Shape;208;p21" descr="image.png"/>
+          <p:cNvPicPr preferRelativeResize="0"/>
+          <p:nvPr/>
+        </p:nvPicPr>
+        <p:blipFill rotWithShape="1">
+          <a:blip r:embed="rId3">
+            <a:alphaModFix/>
+          </a:blip>
+          <a:srcRect/>
+          <a:stretch/>
+        </p:blipFill>
+        <p:spPr>
+          <a:xfrm>
+            <a:off x="0" y="0"/>
+            <a:ext cx="12192000" cy="6858000"/>
+          </a:xfrm>
+          <a:prstGeom prst="rect">
+            <a:avLst/>
+          </a:prstGeom>
+          <a:noFill/>
+          <a:ln>
+            <a:noFill/>
+          </a:ln>
+        </p:spPr>
+      </p:pic>
+      <p:sp>
+        <p:nvSpPr>
+          <p:cNvPr id="209" name="Google Shape;209;p21"/>
+          <p:cNvSpPr txBox="1"/>
+          <p:nvPr/>
+        </p:nvSpPr>
+        <p:spPr>
+          <a:xfrm>
+            <a:off x="1381125" y="3052762"/>
+            <a:ext cx="10239375" cy="266700"/>
+          </a:xfrm>
+          <a:prstGeom prst="rect">
+            <a:avLst/>
+          </a:prstGeom>
+          <a:noFill/>
+          <a:ln>
+            <a:noFill/>
+          </a:ln>
+        </p:spPr>
+        <p:txBody>
+          <a:bodyPr spcFirstLastPara="1" wrap="square" lIns="0" tIns="0" rIns="0" bIns="0" anchor="t" anchorCtr="0">
+            <a:spAutoFit/>
+          </a:bodyPr>
+          <a:lstStyle/>
+          <a:p>
+            <a:pPr marL="0" marR="0" lvl="0" indent="0" algn="l" rtl="0">
+              <a:lnSpc>
+                <a:spcPct val="140000"/>
+              </a:lnSpc>
+              <a:spcBef>
+                <a:spcPts val="0"/>
+              </a:spcBef>
+              <a:spcAft>
+                <a:spcPts val="0"/>
+              </a:spcAft>
+              <a:buNone/>
+            </a:pPr>
+            <a:r>
+              <a:rPr lang="en-US" sz="1500" b="1" i="0" u="none" strike="noStrike" cap="none">
+                <a:solidFill>
+                  <a:srgbClr val="444444"/>
+                </a:solidFill>
+                <a:latin typeface="Lato"/>
+                <a:ea typeface="Lato"/>
+                <a:cs typeface="Lato"/>
+                <a:sym typeface="Lato"/>
+              </a:rPr>
+              <a:t>HTTP 5xx Errors:</a:t>
+            </a:r>
+            <a:r>
+              <a:rPr lang="en-US" sz="1500" b="0" i="0" u="none" strike="noStrike" cap="none">
+                <a:solidFill>
+                  <a:srgbClr val="444444"/>
+                </a:solidFill>
+                <a:latin typeface="Lato"/>
+                <a:ea typeface="Lato"/>
+                <a:cs typeface="Lato"/>
+                <a:sym typeface="Lato"/>
+              </a:rPr>
+              <a:t> Track server-side crashes to trigger P1 alerts immediately.</a:t>
+            </a:r>
+            <a:endParaRPr/>
+          </a:p>
+        </p:txBody>
+      </p:sp>
+      <p:sp>
+        <p:nvSpPr>
+          <p:cNvPr id="210" name="Google Shape;210;p21"/>
+          <p:cNvSpPr txBox="1"/>
+          <p:nvPr/>
+        </p:nvSpPr>
+        <p:spPr>
+          <a:xfrm>
+            <a:off x="1381125" y="3509962"/>
+            <a:ext cx="10239375" cy="266700"/>
+          </a:xfrm>
+          <a:prstGeom prst="rect">
+            <a:avLst/>
+          </a:prstGeom>
+          <a:noFill/>
+          <a:ln>
+            <a:noFill/>
+          </a:ln>
+        </p:spPr>
+        <p:txBody>
+          <a:bodyPr spcFirstLastPara="1" wrap="square" lIns="0" tIns="0" rIns="0" bIns="0" anchor="t" anchorCtr="0">
+            <a:spAutoFit/>
+          </a:bodyPr>
+          <a:lstStyle/>
+          <a:p>
+            <a:pPr marL="0" marR="0" lvl="0" indent="0" algn="l" rtl="0">
+              <a:lnSpc>
+                <a:spcPct val="140000"/>
+              </a:lnSpc>
+              <a:spcBef>
+                <a:spcPts val="0"/>
+              </a:spcBef>
+              <a:spcAft>
+                <a:spcPts val="0"/>
+              </a:spcAft>
+              <a:buNone/>
+            </a:pPr>
+            <a:r>
+              <a:rPr lang="en-US" sz="1500" b="1" i="0" u="none" strike="noStrike" cap="none">
+                <a:solidFill>
+                  <a:srgbClr val="444444"/>
+                </a:solidFill>
+                <a:latin typeface="Lato"/>
+                <a:ea typeface="Lato"/>
+                <a:cs typeface="Lato"/>
+                <a:sym typeface="Lato"/>
+              </a:rPr>
+              <a:t>Lambda Cold Starts:</a:t>
+            </a:r>
+            <a:r>
+              <a:rPr lang="en-US" sz="1500" b="0" i="0" u="none" strike="noStrike" cap="none">
+                <a:solidFill>
+                  <a:srgbClr val="444444"/>
+                </a:solidFill>
+                <a:latin typeface="Lato"/>
+                <a:ea typeface="Lato"/>
+                <a:cs typeface="Lato"/>
+                <a:sym typeface="Lato"/>
+              </a:rPr>
+              <a:t> Monitor init duration patterns to optimize performance.</a:t>
+            </a:r>
+            <a:endParaRPr/>
+          </a:p>
+        </p:txBody>
+      </p:sp>
+      <p:sp>
+        <p:nvSpPr>
+          <p:cNvPr id="211" name="Google Shape;211;p21"/>
+          <p:cNvSpPr txBox="1"/>
+          <p:nvPr/>
+        </p:nvSpPr>
+        <p:spPr>
+          <a:xfrm>
+            <a:off x="1381125" y="3967162"/>
+            <a:ext cx="10239375" cy="266700"/>
+          </a:xfrm>
+          <a:prstGeom prst="rect">
+            <a:avLst/>
+          </a:prstGeom>
+          <a:noFill/>
+          <a:ln>
+            <a:noFill/>
+          </a:ln>
+        </p:spPr>
+        <p:txBody>
+          <a:bodyPr spcFirstLastPara="1" wrap="square" lIns="0" tIns="0" rIns="0" bIns="0" anchor="t" anchorCtr="0">
+            <a:spAutoFit/>
+          </a:bodyPr>
+          <a:lstStyle/>
+          <a:p>
+            <a:pPr marL="0" marR="0" lvl="0" indent="0" algn="l" rtl="0">
+              <a:lnSpc>
+                <a:spcPct val="140000"/>
+              </a:lnSpc>
+              <a:spcBef>
+                <a:spcPts val="0"/>
+              </a:spcBef>
+              <a:spcAft>
+                <a:spcPts val="0"/>
+              </a:spcAft>
+              <a:buNone/>
+            </a:pPr>
+            <a:r>
+              <a:rPr lang="en-US" sz="1500" b="1" i="0" u="none" strike="noStrike" cap="none">
+                <a:solidFill>
+                  <a:srgbClr val="444444"/>
+                </a:solidFill>
+                <a:latin typeface="Lato"/>
+                <a:ea typeface="Lato"/>
+                <a:cs typeface="Lato"/>
+                <a:sym typeface="Lato"/>
+              </a:rPr>
+              <a:t>IAM AccessDenied:</a:t>
+            </a:r>
+            <a:r>
+              <a:rPr lang="en-US" sz="1500" b="0" i="0" u="none" strike="noStrike" cap="none">
+                <a:solidFill>
+                  <a:srgbClr val="444444"/>
+                </a:solidFill>
+                <a:latin typeface="Lato"/>
+                <a:ea typeface="Lato"/>
+                <a:cs typeface="Lato"/>
+                <a:sym typeface="Lato"/>
+              </a:rPr>
+              <a:t> Detect credential compromise or misconfigurations in real-time.</a:t>
+            </a:r>
+            <a:endParaRPr/>
+          </a:p>
+        </p:txBody>
+      </p:sp>
+      <p:sp>
+        <p:nvSpPr>
+          <p:cNvPr id="212" name="Google Shape;212;p21"/>
+          <p:cNvSpPr txBox="1"/>
+          <p:nvPr/>
+        </p:nvSpPr>
+        <p:spPr>
+          <a:xfrm>
+            <a:off x="1381125" y="4424362"/>
+            <a:ext cx="10239375" cy="266700"/>
+          </a:xfrm>
+          <a:prstGeom prst="rect">
+            <a:avLst/>
+          </a:prstGeom>
+          <a:noFill/>
+          <a:ln>
+            <a:noFill/>
+          </a:ln>
+        </p:spPr>
+        <p:txBody>
+          <a:bodyPr spcFirstLastPara="1" wrap="square" lIns="0" tIns="0" rIns="0" bIns="0" anchor="t" anchorCtr="0">
+            <a:spAutoFit/>
+          </a:bodyPr>
+          <a:lstStyle/>
+          <a:p>
+            <a:pPr marL="0" marR="0" lvl="0" indent="0" algn="l" rtl="0">
+              <a:lnSpc>
+                <a:spcPct val="140000"/>
+              </a:lnSpc>
+              <a:spcBef>
+                <a:spcPts val="0"/>
+              </a:spcBef>
+              <a:spcAft>
+                <a:spcPts val="0"/>
+              </a:spcAft>
+              <a:buNone/>
+            </a:pPr>
+            <a:r>
+              <a:rPr lang="en-US" sz="1500" b="1" i="0" u="none" strike="noStrike" cap="none">
+                <a:solidFill>
+                  <a:srgbClr val="444444"/>
+                </a:solidFill>
+                <a:latin typeface="Lato"/>
+                <a:ea typeface="Lato"/>
+                <a:cs typeface="Lato"/>
+                <a:sym typeface="Lato"/>
+              </a:rPr>
+              <a:t>Ingestion Drops:</a:t>
+            </a:r>
+            <a:r>
+              <a:rPr lang="en-US" sz="1500" b="0" i="0" u="none" strike="noStrike" cap="none">
+                <a:solidFill>
+                  <a:srgbClr val="444444"/>
+                </a:solidFill>
+                <a:latin typeface="Lato"/>
+                <a:ea typeface="Lato"/>
+                <a:cs typeface="Lato"/>
+                <a:sym typeface="Lato"/>
+              </a:rPr>
+              <a:t> Alert if log flow stops, indicating a broken agent or pipeline.</a:t>
+            </a:r>
+            <a:endParaRPr/>
+          </a:p>
+        </p:txBody>
+      </p:sp>
+      <p:pic>
+        <p:nvPicPr>
+          <p:cNvPr id="213" name="Google Shape;213;p21" descr="image.png"/>
+          <p:cNvPicPr preferRelativeResize="0"/>
+          <p:nvPr/>
+        </p:nvPicPr>
+        <p:blipFill rotWithShape="1">
+          <a:blip r:embed="rId4">
+            <a:alphaModFix/>
+          </a:blip>
+          <a:srcRect/>
+          <a:stretch/>
+        </p:blipFill>
+        <p:spPr>
+          <a:xfrm>
+            <a:off x="952500" y="3081337"/>
+            <a:ext cx="228600" cy="247650"/>
+          </a:xfrm>
+          <a:prstGeom prst="rect">
+            <a:avLst/>
+          </a:prstGeom>
+          <a:noFill/>
+          <a:ln>
+            <a:noFill/>
+          </a:ln>
+        </p:spPr>
+      </p:pic>
+      <p:pic>
+        <p:nvPicPr>
+          <p:cNvPr id="214" name="Google Shape;214;p21" descr="image.png"/>
+          <p:cNvPicPr preferRelativeResize="0"/>
+          <p:nvPr/>
+        </p:nvPicPr>
+        <p:blipFill rotWithShape="1">
+          <a:blip r:embed="rId5">
+            <a:alphaModFix/>
+          </a:blip>
+          <a:srcRect/>
+          <a:stretch/>
+        </p:blipFill>
+        <p:spPr>
+          <a:xfrm>
+            <a:off x="952500" y="3538537"/>
+            <a:ext cx="200025" cy="247650"/>
+          </a:xfrm>
+          <a:prstGeom prst="rect">
+            <a:avLst/>
+          </a:prstGeom>
+          <a:noFill/>
+          <a:ln>
+            <a:noFill/>
+          </a:ln>
+        </p:spPr>
+      </p:pic>
+      <p:pic>
+        <p:nvPicPr>
+          <p:cNvPr id="215" name="Google Shape;215;p21" descr="image.png"/>
+          <p:cNvPicPr preferRelativeResize="0"/>
+          <p:nvPr/>
+        </p:nvPicPr>
+        <p:blipFill rotWithShape="1">
+          <a:blip r:embed="rId6">
+            <a:alphaModFix/>
+          </a:blip>
+          <a:srcRect/>
+          <a:stretch/>
+        </p:blipFill>
+        <p:spPr>
+          <a:xfrm>
+            <a:off x="952500" y="3995737"/>
+            <a:ext cx="285750" cy="247650"/>
+          </a:xfrm>
+          <a:prstGeom prst="rect">
+            <a:avLst/>
+          </a:prstGeom>
+          <a:noFill/>
+          <a:ln>
+            <a:noFill/>
+          </a:ln>
+        </p:spPr>
+      </p:pic>
+      <p:pic>
+        <p:nvPicPr>
+          <p:cNvPr id="216" name="Google Shape;216;p21" descr="image.png"/>
+          <p:cNvPicPr preferRelativeResize="0"/>
+          <p:nvPr/>
+        </p:nvPicPr>
+        <p:blipFill rotWithShape="1">
+          <a:blip r:embed="rId7">
+            <a:alphaModFix/>
+          </a:blip>
+          <a:srcRect/>
+          <a:stretch/>
+        </p:blipFill>
+        <p:spPr>
+          <a:xfrm>
+            <a:off x="952500" y="4452937"/>
+            <a:ext cx="228600" cy="247650"/>
+          </a:xfrm>
+          <a:prstGeom prst="rect">
+            <a:avLst/>
+          </a:prstGeom>
+          <a:noFill/>
+          <a:ln>
+            <a:noFill/>
+          </a:ln>
+        </p:spPr>
+      </p:pic>
+      <p:sp>
+        <p:nvSpPr>
+          <p:cNvPr id="217" name="Google Shape;217;p21"/>
+          <p:cNvSpPr txBox="1"/>
+          <p:nvPr/>
+        </p:nvSpPr>
+        <p:spPr>
+          <a:xfrm>
+            <a:off x="762000" y="571500"/>
+            <a:ext cx="11401425" cy="542925"/>
+          </a:xfrm>
+          <a:prstGeom prst="rect">
+            <a:avLst/>
+          </a:prstGeom>
+          <a:noFill/>
+          <a:ln>
+            <a:noFill/>
+          </a:ln>
+        </p:spPr>
+        <p:txBody>
+          <a:bodyPr spcFirstLastPara="1" wrap="square" lIns="0" tIns="0" rIns="0" bIns="0" anchor="t" anchorCtr="0">
+            <a:spAutoFit/>
+          </a:bodyPr>
+          <a:lstStyle/>
+          <a:p>
+            <a:pPr marL="0" marR="0" lvl="0" indent="0" algn="l" rtl="0">
+              <a:spcBef>
+                <a:spcPts val="0"/>
+              </a:spcBef>
+              <a:spcAft>
+                <a:spcPts val="0"/>
+              </a:spcAft>
+              <a:buNone/>
+            </a:pPr>
+            <a:r>
+              <a:rPr lang="en-US" sz="2850" b="1" i="0" u="none" strike="noStrike" cap="none">
+                <a:solidFill>
+                  <a:srgbClr val="232F3E"/>
+                </a:solidFill>
+                <a:latin typeface="Poppins"/>
+                <a:ea typeface="Poppins"/>
+                <a:cs typeface="Poppins"/>
+                <a:sym typeface="Poppins"/>
+              </a:rPr>
+              <a:t>Metric Filters to Implement</a:t>
+            </a:r>
+            <a:endParaRPr/>
+          </a:p>
+        </p:txBody>
+      </p:sp>
+      <p:sp>
+        <p:nvSpPr>
+          <p:cNvPr id="218" name="Google Shape;218;p21"/>
+          <p:cNvSpPr/>
+          <p:nvPr/>
+        </p:nvSpPr>
+        <p:spPr>
+          <a:xfrm>
+            <a:off x="571500" y="571500"/>
+            <a:ext cx="57150" cy="542925"/>
+          </a:xfrm>
+          <a:prstGeom prst="rect">
+            <a:avLst/>
+          </a:prstGeom>
+          <a:solidFill>
+            <a:srgbClr val="FF9900"/>
+          </a:solidFill>
+          <a:ln>
+            <a:noFill/>
+          </a:ln>
+        </p:spPr>
+        <p:txBody>
+          <a:bodyPr spcFirstLastPara="1" wrap="square" lIns="91425" tIns="45700" rIns="91425" bIns="45700" anchor="ctr" anchorCtr="0">
+            <a:noAutofit/>
+          </a:bodyPr>
+          <a:lstStyle/>
+          <a:p>
+            <a:pPr marL="0" marR="0" lvl="0" indent="0" algn="ctr" rtl="0">
+              <a:spcBef>
+                <a:spcPts val="0"/>
+              </a:spcBef>
+              <a:spcAft>
+                <a:spcPts val="0"/>
+              </a:spcAft>
+              <a:buNone/>
+            </a:pPr>
+            <a:endParaRPr sz="1800" b="0" i="0" u="none" strike="noStrike" cap="none">
+              <a:solidFill>
+                <a:schemeClr val="dk1"/>
+              </a:solidFill>
+              <a:latin typeface="Calibri"/>
+              <a:ea typeface="Calibri"/>
+              <a:cs typeface="Calibri"/>
+              <a:sym typeface="Calibri"/>
+            </a:endParaRPr>
+          </a:p>
+        </p:txBody>
+      </p:sp>
+    </p:spTree>
+  </p:cSld>
+  <p:clrMapOvr>
+    <a:masterClrMapping/>
+  </p:clrMapOvr>
+</p:sld>
+</file>
+
+<file path=ppt/slides/slide12.xml><?xml version="1.0" encoding="utf-8"?>
+<p:sld xmlns:a="http://schemas.openxmlformats.org/drawingml/2006/main" xmlns:r="http://schemas.openxmlformats.org/officeDocument/2006/relationships" xmlns:p="http://schemas.openxmlformats.org/presentationml/2006/main">
+  <p:cSld>
+    <p:bg>
+      <p:bgPr>
+        <a:solidFill>
+          <a:srgbClr val="FFFFFF"/>
+        </a:solidFill>
+        <a:effectLst/>
+      </p:bgPr>
+    </p:bg>
+    <p:spTree>
+      <p:nvGrpSpPr>
         <p:cNvPr id="1" name="Shape 222"/>
         <p:cNvGrpSpPr/>
         <p:nvPr/>
@@ -13354,7 +14502,7 @@
 </p:sld>
 </file>
 
-<file path=ppt/slides/slide11.xml><?xml version="1.0" encoding="utf-8"?>
+<file path=ppt/slides/slide13.xml><?xml version="1.0" encoding="utf-8"?>
 <p:sld xmlns:a="http://schemas.openxmlformats.org/drawingml/2006/main" xmlns:r="http://schemas.openxmlformats.org/officeDocument/2006/relationships" xmlns:p="http://schemas.openxmlformats.org/presentationml/2006/main">
   <p:cSld>
     <p:bg>
@@ -13921,7 +15069,7 @@
 </p:sld>
 </file>
 
-<file path=ppt/slides/slide12.xml><?xml version="1.0" encoding="utf-8"?>
+<file path=ppt/slides/slide14.xml><?xml version="1.0" encoding="utf-8"?>
 <p:sld xmlns:a="http://schemas.openxmlformats.org/drawingml/2006/main" xmlns:r="http://schemas.openxmlformats.org/officeDocument/2006/relationships" xmlns:p="http://schemas.openxmlformats.org/presentationml/2006/main">
   <p:cSld>
     <p:bg>
@@ -15483,6 +16631,347 @@
 </file>
 
 <file path=ppt/slides/slide4.xml><?xml version="1.0" encoding="utf-8"?>
+<p:sld xmlns:a="http://schemas.openxmlformats.org/drawingml/2006/main" xmlns:r="http://schemas.openxmlformats.org/officeDocument/2006/relationships" xmlns:p="http://schemas.openxmlformats.org/presentationml/2006/main">
+  <p:cSld>
+    <p:bg>
+      <p:bgPr>
+        <a:solidFill>
+          <a:srgbClr val="FFFFFF"/>
+        </a:solidFill>
+        <a:effectLst/>
+      </p:bgPr>
+    </p:bg>
+    <p:spTree>
+      <p:nvGrpSpPr>
+        <p:cNvPr id="1" name="Shape 110"/>
+        <p:cNvGrpSpPr/>
+        <p:nvPr/>
+      </p:nvGrpSpPr>
+      <p:grpSpPr>
+        <a:xfrm>
+          <a:off x="0" y="0"/>
+          <a:ext cx="0" cy="0"/>
+          <a:chOff x="0" y="0"/>
+          <a:chExt cx="0" cy="0"/>
+        </a:xfrm>
+      </p:grpSpPr>
+      <p:pic>
+        <p:nvPicPr>
+          <p:cNvPr id="111" name="Google Shape;111;p15" descr="image.png"/>
+          <p:cNvPicPr preferRelativeResize="0"/>
+          <p:nvPr/>
+        </p:nvPicPr>
+        <p:blipFill rotWithShape="1">
+          <a:blip r:embed="rId3">
+            <a:alphaModFix/>
+          </a:blip>
+          <a:srcRect/>
+          <a:stretch/>
+        </p:blipFill>
+        <p:spPr>
+          <a:xfrm>
+            <a:off x="0" y="0"/>
+            <a:ext cx="12192000" cy="6858000"/>
+          </a:xfrm>
+          <a:prstGeom prst="rect">
+            <a:avLst/>
+          </a:prstGeom>
+          <a:noFill/>
+          <a:ln>
+            <a:noFill/>
+          </a:ln>
+        </p:spPr>
+      </p:pic>
+      <p:sp>
+        <p:nvSpPr>
+          <p:cNvPr id="120" name="Google Shape;120;p15"/>
+          <p:cNvSpPr txBox="1"/>
+          <p:nvPr/>
+        </p:nvSpPr>
+        <p:spPr>
+          <a:xfrm>
+            <a:off x="762000" y="571500"/>
+            <a:ext cx="11401425" cy="438582"/>
+          </a:xfrm>
+          <a:prstGeom prst="rect">
+            <a:avLst/>
+          </a:prstGeom>
+          <a:noFill/>
+          <a:ln>
+            <a:noFill/>
+          </a:ln>
+        </p:spPr>
+        <p:txBody>
+          <a:bodyPr spcFirstLastPara="1" wrap="square" lIns="0" tIns="0" rIns="0" bIns="0" anchor="t" anchorCtr="0">
+            <a:spAutoFit/>
+          </a:bodyPr>
+          <a:lstStyle/>
+          <a:p>
+            <a:pPr marL="0" marR="0" lvl="0" indent="0" algn="l" rtl="0">
+              <a:spcBef>
+                <a:spcPts val="0"/>
+              </a:spcBef>
+              <a:spcAft>
+                <a:spcPts val="0"/>
+              </a:spcAft>
+              <a:buNone/>
+            </a:pPr>
+            <a:r>
+              <a:rPr lang="en-US" sz="2850" b="1" dirty="0">
+                <a:solidFill>
+                  <a:srgbClr val="232F3E"/>
+                </a:solidFill>
+                <a:latin typeface="Poppins"/>
+                <a:ea typeface="Poppins"/>
+                <a:cs typeface="Poppins"/>
+                <a:sym typeface="Poppins"/>
+              </a:rPr>
+              <a:t>Other types of </a:t>
+            </a:r>
+            <a:r>
+              <a:rPr lang="en-US" sz="2850" b="1" i="0" u="none" strike="noStrike" cap="none" dirty="0">
+                <a:solidFill>
+                  <a:srgbClr val="232F3E"/>
+                </a:solidFill>
+                <a:latin typeface="Poppins"/>
+                <a:ea typeface="Poppins"/>
+                <a:cs typeface="Poppins"/>
+                <a:sym typeface="Poppins"/>
+              </a:rPr>
+              <a:t>Logs</a:t>
+            </a:r>
+            <a:endParaRPr dirty="0"/>
+          </a:p>
+        </p:txBody>
+      </p:sp>
+      <p:sp>
+        <p:nvSpPr>
+          <p:cNvPr id="121" name="Google Shape;121;p15"/>
+          <p:cNvSpPr/>
+          <p:nvPr/>
+        </p:nvSpPr>
+        <p:spPr>
+          <a:xfrm>
+            <a:off x="571500" y="571500"/>
+            <a:ext cx="57150" cy="542925"/>
+          </a:xfrm>
+          <a:prstGeom prst="rect">
+            <a:avLst/>
+          </a:prstGeom>
+          <a:solidFill>
+            <a:srgbClr val="FF9900"/>
+          </a:solidFill>
+          <a:ln>
+            <a:noFill/>
+          </a:ln>
+        </p:spPr>
+        <p:txBody>
+          <a:bodyPr spcFirstLastPara="1" wrap="square" lIns="91425" tIns="45700" rIns="91425" bIns="45700" anchor="ctr" anchorCtr="0">
+            <a:noAutofit/>
+          </a:bodyPr>
+          <a:lstStyle/>
+          <a:p>
+            <a:pPr marL="0" marR="0" lvl="0" indent="0" algn="ctr" rtl="0">
+              <a:spcBef>
+                <a:spcPts val="0"/>
+              </a:spcBef>
+              <a:spcAft>
+                <a:spcPts val="0"/>
+              </a:spcAft>
+              <a:buNone/>
+            </a:pPr>
+            <a:endParaRPr sz="1800" b="0" i="0" u="none" strike="noStrike" cap="none">
+              <a:solidFill>
+                <a:schemeClr val="dk1"/>
+              </a:solidFill>
+              <a:latin typeface="Calibri"/>
+              <a:ea typeface="Calibri"/>
+              <a:cs typeface="Calibri"/>
+              <a:sym typeface="Calibri"/>
+            </a:endParaRPr>
+          </a:p>
+        </p:txBody>
+      </p:sp>
+      <p:sp>
+        <p:nvSpPr>
+          <p:cNvPr id="2" name="TextBox 1">
+            <a:extLst>
+              <a:ext uri="{FF2B5EF4-FFF2-40B4-BE49-F238E27FC236}">
+                <a16:creationId xmlns:a16="http://schemas.microsoft.com/office/drawing/2014/main" id="{30DD5E16-6DA4-44F2-B6CB-FF916F54C1CE}"/>
+              </a:ext>
+            </a:extLst>
+          </p:cNvPr>
+          <p:cNvSpPr txBox="1"/>
+          <p:nvPr/>
+        </p:nvSpPr>
+        <p:spPr>
+          <a:xfrm>
+            <a:off x="571500" y="1603948"/>
+            <a:ext cx="11063678" cy="4308872"/>
+          </a:xfrm>
+          <a:prstGeom prst="rect">
+            <a:avLst/>
+          </a:prstGeom>
+          <a:noFill/>
+        </p:spPr>
+        <p:txBody>
+          <a:bodyPr wrap="square" rtlCol="0">
+            <a:spAutoFit/>
+          </a:bodyPr>
+          <a:lstStyle/>
+          <a:p>
+            <a:pPr marL="342900" indent="-342900">
+              <a:buFont typeface="Arial" panose="020B0604020202020204" pitchFamily="34" charset="0"/>
+              <a:buChar char="•"/>
+            </a:pPr>
+            <a:r>
+              <a:rPr lang="en-US" sz="2000" b="1" dirty="0">
+                <a:solidFill>
+                  <a:srgbClr val="232F3E"/>
+                </a:solidFill>
+                <a:latin typeface="Poppins"/>
+                <a:cs typeface="Poppins"/>
+              </a:rPr>
+              <a:t>Network Logs (Flow Logs) </a:t>
+            </a:r>
+            <a:r>
+              <a:rPr lang="en-US" sz="2000" dirty="0">
+                <a:solidFill>
+                  <a:srgbClr val="232F3E"/>
+                </a:solidFill>
+                <a:latin typeface="Poppins"/>
+                <a:cs typeface="Poppins"/>
+              </a:rPr>
+              <a:t>-These record the IP traffic going to and from network interfaces. They are critical for security forensics and troubleshooting connectivity issues.</a:t>
+            </a:r>
+          </a:p>
+          <a:p>
+            <a:pPr marL="342900" indent="-342900">
+              <a:buFont typeface="Arial" panose="020B0604020202020204" pitchFamily="34" charset="0"/>
+              <a:buChar char="•"/>
+            </a:pPr>
+            <a:r>
+              <a:rPr lang="en-US" sz="2000" b="1" dirty="0">
+                <a:solidFill>
+                  <a:srgbClr val="232F3E"/>
+                </a:solidFill>
+                <a:latin typeface="Poppins"/>
+                <a:cs typeface="Poppins"/>
+              </a:rPr>
+              <a:t>Application Logs</a:t>
+            </a:r>
+            <a:r>
+              <a:rPr lang="en-US" sz="2000" dirty="0">
+                <a:solidFill>
+                  <a:srgbClr val="232F3E"/>
+                </a:solidFill>
+                <a:latin typeface="Poppins"/>
+                <a:cs typeface="Poppins"/>
+              </a:rPr>
+              <a:t> - Generated by the code or the runtime environment (e.g., Java, Python, Node.js). These are custom-defined by developers to track the internal health of an app.</a:t>
+            </a:r>
+          </a:p>
+          <a:p>
+            <a:pPr marL="342900" indent="-342900">
+              <a:buFont typeface="Arial" panose="020B0604020202020204" pitchFamily="34" charset="0"/>
+              <a:buChar char="•"/>
+            </a:pPr>
+            <a:r>
+              <a:rPr lang="en-US" sz="2000" b="1" dirty="0">
+                <a:solidFill>
+                  <a:srgbClr val="232F3E"/>
+                </a:solidFill>
+                <a:latin typeface="Poppins"/>
+                <a:cs typeface="Poppins"/>
+              </a:rPr>
+              <a:t>Resource &amp; Service Logs </a:t>
+            </a:r>
+            <a:r>
+              <a:rPr lang="en-US" sz="2000" dirty="0">
+                <a:solidFill>
+                  <a:srgbClr val="232F3E"/>
+                </a:solidFill>
+                <a:latin typeface="Poppins"/>
+                <a:cs typeface="Poppins"/>
+              </a:rPr>
+              <a:t>-These logs come from the cloud services themselves (managed databases, load balancers, etc.) and describe their internal operations rather than user actions.</a:t>
+            </a:r>
+          </a:p>
+          <a:p>
+            <a:pPr marL="342900" indent="-342900">
+              <a:buFont typeface="Arial" panose="020B0604020202020204" pitchFamily="34" charset="0"/>
+              <a:buChar char="•"/>
+            </a:pPr>
+            <a:r>
+              <a:rPr lang="en-US" sz="2000" b="1" dirty="0">
+                <a:solidFill>
+                  <a:srgbClr val="232F3E"/>
+                </a:solidFill>
+                <a:latin typeface="Poppins"/>
+                <a:cs typeface="Poppins"/>
+              </a:rPr>
+              <a:t>System (OS-Level) </a:t>
+            </a:r>
+            <a:r>
+              <a:rPr lang="en-US" sz="2000" dirty="0">
+                <a:solidFill>
+                  <a:srgbClr val="232F3E"/>
+                </a:solidFill>
+                <a:latin typeface="Poppins"/>
+                <a:cs typeface="Poppins"/>
+              </a:rPr>
+              <a:t>Logs -These are generated by the operating system (Linux/Windows) running on your Virtual Machines.</a:t>
+            </a:r>
+          </a:p>
+          <a:p>
+            <a:pPr marL="342900" indent="-342900">
+              <a:buFont typeface="Arial" panose="020B0604020202020204" pitchFamily="34" charset="0"/>
+              <a:buChar char="•"/>
+            </a:pPr>
+            <a:r>
+              <a:rPr lang="en-US" sz="2000" b="1" dirty="0">
+                <a:solidFill>
+                  <a:srgbClr val="232F3E"/>
+                </a:solidFill>
+                <a:latin typeface="Poppins"/>
+                <a:cs typeface="Poppins"/>
+              </a:rPr>
+              <a:t>Access Logs-Specific</a:t>
+            </a:r>
+            <a:r>
+              <a:rPr lang="en-US" sz="2000" dirty="0">
+                <a:solidFill>
+                  <a:srgbClr val="232F3E"/>
+                </a:solidFill>
+                <a:latin typeface="Poppins"/>
+                <a:cs typeface="Poppins"/>
+              </a:rPr>
+              <a:t> to storage and delivery services, these track every single request made to an object or a file.</a:t>
+            </a:r>
+          </a:p>
+          <a:p>
+            <a:pPr marL="285750" indent="-285750">
+              <a:buFont typeface="Arial" panose="020B0604020202020204" pitchFamily="34" charset="0"/>
+              <a:buChar char="•"/>
+            </a:pPr>
+            <a:endParaRPr lang="en-US" dirty="0"/>
+          </a:p>
+        </p:txBody>
+      </p:sp>
+    </p:spTree>
+    <p:extLst>
+      <p:ext uri="{BB962C8B-B14F-4D97-AF65-F5344CB8AC3E}">
+        <p14:creationId xmlns:p14="http://schemas.microsoft.com/office/powerpoint/2010/main" val="2667545183"/>
+      </p:ext>
+    </p:extLst>
+  </p:cSld>
+  <p:clrMapOvr>
+    <a:masterClrMapping/>
+  </p:clrMapOvr>
+</p:sld>
+</file>
+
+<file path=ppt/slides/slide5.xml><?xml version="1.0" encoding="utf-8"?>
 <p:sld xmlns:a="http://schemas.openxmlformats.org/drawingml/2006/main" xmlns:r="http://schemas.openxmlformats.org/officeDocument/2006/relationships" xmlns:p="http://schemas.openxmlformats.org/presentationml/2006/main">
   <p:cSld>
     <p:bg>
@@ -17468,7 +18957,7 @@
 </p:sld>
 </file>
 
-<file path=ppt/slides/slide5.xml><?xml version="1.0" encoding="utf-8"?>
+<file path=ppt/slides/slide6.xml><?xml version="1.0" encoding="utf-8"?>
 <p:sld xmlns:a="http://schemas.openxmlformats.org/drawingml/2006/main" xmlns:r="http://schemas.openxmlformats.org/officeDocument/2006/relationships" xmlns:p="http://schemas.openxmlformats.org/presentationml/2006/main">
   <p:cSld>
     <p:bg>
@@ -18137,7 +19626,681 @@
 </p:sld>
 </file>
 
-<file path=ppt/slides/slide6.xml><?xml version="1.0" encoding="utf-8"?>
+<file path=ppt/slides/slide7.xml><?xml version="1.0" encoding="utf-8"?>
+<p:sld xmlns:a="http://schemas.openxmlformats.org/drawingml/2006/main" xmlns:r="http://schemas.openxmlformats.org/officeDocument/2006/relationships" xmlns:p="http://schemas.openxmlformats.org/presentationml/2006/main">
+  <p:cSld>
+    <p:bg>
+      <p:bgPr>
+        <a:solidFill>
+          <a:srgbClr val="FFFFFF"/>
+        </a:solidFill>
+        <a:effectLst/>
+      </p:bgPr>
+    </p:bg>
+    <p:spTree>
+      <p:nvGrpSpPr>
+        <p:cNvPr id="1" name="Shape 145"/>
+        <p:cNvGrpSpPr/>
+        <p:nvPr/>
+      </p:nvGrpSpPr>
+      <p:grpSpPr>
+        <a:xfrm>
+          <a:off x="0" y="0"/>
+          <a:ext cx="0" cy="0"/>
+          <a:chOff x="0" y="0"/>
+          <a:chExt cx="0" cy="0"/>
+        </a:xfrm>
+      </p:grpSpPr>
+      <p:pic>
+        <p:nvPicPr>
+          <p:cNvPr id="146" name="Google Shape;146;p17" descr="image.png"/>
+          <p:cNvPicPr preferRelativeResize="0"/>
+          <p:nvPr/>
+        </p:nvPicPr>
+        <p:blipFill rotWithShape="1">
+          <a:blip r:embed="rId3">
+            <a:alphaModFix/>
+          </a:blip>
+          <a:srcRect/>
+          <a:stretch/>
+        </p:blipFill>
+        <p:spPr>
+          <a:xfrm>
+            <a:off x="0" y="0"/>
+            <a:ext cx="12192000" cy="6858000"/>
+          </a:xfrm>
+          <a:prstGeom prst="rect">
+            <a:avLst/>
+          </a:prstGeom>
+          <a:noFill/>
+          <a:ln>
+            <a:noFill/>
+          </a:ln>
+        </p:spPr>
+      </p:pic>
+      <p:pic>
+        <p:nvPicPr>
+          <p:cNvPr id="147" name="Google Shape;147;p17" descr="image.png"/>
+          <p:cNvPicPr preferRelativeResize="0"/>
+          <p:nvPr/>
+        </p:nvPicPr>
+        <p:blipFill rotWithShape="1">
+          <a:blip r:embed="rId4">
+            <a:alphaModFix/>
+          </a:blip>
+          <a:srcRect/>
+          <a:stretch/>
+        </p:blipFill>
+        <p:spPr>
+          <a:xfrm>
+            <a:off x="571500" y="2690812"/>
+            <a:ext cx="3492549" cy="2400300"/>
+          </a:xfrm>
+          <a:prstGeom prst="rect">
+            <a:avLst/>
+          </a:prstGeom>
+          <a:noFill/>
+          <a:ln>
+            <a:noFill/>
+          </a:ln>
+        </p:spPr>
+      </p:pic>
+      <p:pic>
+        <p:nvPicPr>
+          <p:cNvPr id="148" name="Google Shape;148;p17" descr="image.png"/>
+          <p:cNvPicPr preferRelativeResize="0"/>
+          <p:nvPr/>
+        </p:nvPicPr>
+        <p:blipFill rotWithShape="1">
+          <a:blip r:embed="rId5">
+            <a:alphaModFix/>
+          </a:blip>
+          <a:srcRect/>
+          <a:stretch/>
+        </p:blipFill>
+        <p:spPr>
+          <a:xfrm>
+            <a:off x="4349799" y="2690812"/>
+            <a:ext cx="3492549" cy="2400300"/>
+          </a:xfrm>
+          <a:prstGeom prst="rect">
+            <a:avLst/>
+          </a:prstGeom>
+          <a:noFill/>
+          <a:ln>
+            <a:noFill/>
+          </a:ln>
+        </p:spPr>
+      </p:pic>
+      <p:pic>
+        <p:nvPicPr>
+          <p:cNvPr id="149" name="Google Shape;149;p17" descr="image.png"/>
+          <p:cNvPicPr preferRelativeResize="0"/>
+          <p:nvPr/>
+        </p:nvPicPr>
+        <p:blipFill rotWithShape="1">
+          <a:blip r:embed="rId6">
+            <a:alphaModFix/>
+          </a:blip>
+          <a:srcRect/>
+          <a:stretch/>
+        </p:blipFill>
+        <p:spPr>
+          <a:xfrm>
+            <a:off x="8128099" y="2690812"/>
+            <a:ext cx="3492549" cy="2400300"/>
+          </a:xfrm>
+          <a:prstGeom prst="rect">
+            <a:avLst/>
+          </a:prstGeom>
+          <a:noFill/>
+          <a:ln>
+            <a:noFill/>
+          </a:ln>
+        </p:spPr>
+      </p:pic>
+      <p:sp>
+        <p:nvSpPr>
+          <p:cNvPr id="150" name="Google Shape;150;p17"/>
+          <p:cNvSpPr txBox="1"/>
+          <p:nvPr/>
+        </p:nvSpPr>
+        <p:spPr>
+          <a:xfrm>
+            <a:off x="857250" y="3576637"/>
+            <a:ext cx="3067102" cy="400050"/>
+          </a:xfrm>
+          <a:prstGeom prst="rect">
+            <a:avLst/>
+          </a:prstGeom>
+          <a:noFill/>
+          <a:ln>
+            <a:noFill/>
+          </a:ln>
+        </p:spPr>
+        <p:txBody>
+          <a:bodyPr spcFirstLastPara="1" wrap="square" lIns="0" tIns="0" rIns="0" bIns="0" anchor="t" anchorCtr="0">
+            <a:spAutoFit/>
+          </a:bodyPr>
+          <a:lstStyle/>
+          <a:p>
+            <a:pPr marL="0" marR="0" lvl="0" indent="0" algn="l" rtl="0">
+              <a:spcBef>
+                <a:spcPts val="0"/>
+              </a:spcBef>
+              <a:spcAft>
+                <a:spcPts val="0"/>
+              </a:spcAft>
+              <a:buNone/>
+            </a:pPr>
+            <a:r>
+              <a:rPr lang="en-US" sz="2100" b="1" i="0" u="none" strike="noStrike" cap="none">
+                <a:solidFill>
+                  <a:srgbClr val="0073BB"/>
+                </a:solidFill>
+                <a:latin typeface="Poppins"/>
+                <a:ea typeface="Poppins"/>
+                <a:cs typeface="Poppins"/>
+                <a:sym typeface="Poppins"/>
+              </a:rPr>
+              <a:t>Tier 1: Security</a:t>
+            </a:r>
+            <a:endParaRPr/>
+          </a:p>
+        </p:txBody>
+      </p:sp>
+      <p:sp>
+        <p:nvSpPr>
+          <p:cNvPr id="151" name="Google Shape;151;p17"/>
+          <p:cNvSpPr txBox="1"/>
+          <p:nvPr/>
+        </p:nvSpPr>
+        <p:spPr>
+          <a:xfrm>
+            <a:off x="857250" y="4090987"/>
+            <a:ext cx="2921049" cy="533400"/>
+          </a:xfrm>
+          <a:prstGeom prst="rect">
+            <a:avLst/>
+          </a:prstGeom>
+          <a:noFill/>
+          <a:ln>
+            <a:noFill/>
+          </a:ln>
+        </p:spPr>
+        <p:txBody>
+          <a:bodyPr spcFirstLastPara="1" wrap="square" lIns="0" tIns="0" rIns="0" bIns="0" anchor="t" anchorCtr="0">
+            <a:spAutoFit/>
+          </a:bodyPr>
+          <a:lstStyle/>
+          <a:p>
+            <a:pPr marL="0" marR="0" lvl="0" indent="0" algn="l" rtl="0">
+              <a:lnSpc>
+                <a:spcPct val="140000"/>
+              </a:lnSpc>
+              <a:spcBef>
+                <a:spcPts val="0"/>
+              </a:spcBef>
+              <a:spcAft>
+                <a:spcPts val="0"/>
+              </a:spcAft>
+              <a:buNone/>
+            </a:pPr>
+            <a:r>
+              <a:rPr lang="en-US" sz="1500" b="0" i="0" u="none" strike="noStrike" cap="none">
+                <a:solidFill>
+                  <a:srgbClr val="444444"/>
+                </a:solidFill>
+                <a:latin typeface="Lato"/>
+                <a:ea typeface="Lato"/>
+                <a:cs typeface="Lato"/>
+                <a:sym typeface="Lato"/>
+              </a:rPr>
+              <a:t>CloudTrail, GuardDuty. Immutable, encrypted, long-term retention.</a:t>
+            </a:r>
+            <a:endParaRPr/>
+          </a:p>
+        </p:txBody>
+      </p:sp>
+      <p:sp>
+        <p:nvSpPr>
+          <p:cNvPr id="152" name="Google Shape;152;p17"/>
+          <p:cNvSpPr txBox="1"/>
+          <p:nvPr/>
+        </p:nvSpPr>
+        <p:spPr>
+          <a:xfrm>
+            <a:off x="4635549" y="3576637"/>
+            <a:ext cx="3067102" cy="400050"/>
+          </a:xfrm>
+          <a:prstGeom prst="rect">
+            <a:avLst/>
+          </a:prstGeom>
+          <a:noFill/>
+          <a:ln>
+            <a:noFill/>
+          </a:ln>
+        </p:spPr>
+        <p:txBody>
+          <a:bodyPr spcFirstLastPara="1" wrap="square" lIns="0" tIns="0" rIns="0" bIns="0" anchor="t" anchorCtr="0">
+            <a:spAutoFit/>
+          </a:bodyPr>
+          <a:lstStyle/>
+          <a:p>
+            <a:pPr marL="0" marR="0" lvl="0" indent="0" algn="l" rtl="0">
+              <a:spcBef>
+                <a:spcPts val="0"/>
+              </a:spcBef>
+              <a:spcAft>
+                <a:spcPts val="0"/>
+              </a:spcAft>
+              <a:buNone/>
+            </a:pPr>
+            <a:r>
+              <a:rPr lang="en-US" sz="2100" b="1" i="0" u="none" strike="noStrike" cap="none">
+                <a:solidFill>
+                  <a:srgbClr val="0073BB"/>
+                </a:solidFill>
+                <a:latin typeface="Poppins"/>
+                <a:ea typeface="Poppins"/>
+                <a:cs typeface="Poppins"/>
+                <a:sym typeface="Poppins"/>
+              </a:rPr>
+              <a:t>Tier 2: Operational</a:t>
+            </a:r>
+            <a:endParaRPr/>
+          </a:p>
+        </p:txBody>
+      </p:sp>
+      <p:sp>
+        <p:nvSpPr>
+          <p:cNvPr id="153" name="Google Shape;153;p17"/>
+          <p:cNvSpPr txBox="1"/>
+          <p:nvPr/>
+        </p:nvSpPr>
+        <p:spPr>
+          <a:xfrm>
+            <a:off x="4635549" y="4090987"/>
+            <a:ext cx="2921049" cy="533400"/>
+          </a:xfrm>
+          <a:prstGeom prst="rect">
+            <a:avLst/>
+          </a:prstGeom>
+          <a:noFill/>
+          <a:ln>
+            <a:noFill/>
+          </a:ln>
+        </p:spPr>
+        <p:txBody>
+          <a:bodyPr spcFirstLastPara="1" wrap="square" lIns="0" tIns="0" rIns="0" bIns="0" anchor="t" anchorCtr="0">
+            <a:spAutoFit/>
+          </a:bodyPr>
+          <a:lstStyle/>
+          <a:p>
+            <a:pPr marL="0" marR="0" lvl="0" indent="0" algn="l" rtl="0">
+              <a:lnSpc>
+                <a:spcPct val="140000"/>
+              </a:lnSpc>
+              <a:spcBef>
+                <a:spcPts val="0"/>
+              </a:spcBef>
+              <a:spcAft>
+                <a:spcPts val="0"/>
+              </a:spcAft>
+              <a:buNone/>
+            </a:pPr>
+            <a:r>
+              <a:rPr lang="en-US" sz="1500" b="0" i="0" u="none" strike="noStrike" cap="none">
+                <a:solidFill>
+                  <a:srgbClr val="444444"/>
+                </a:solidFill>
+                <a:latin typeface="Lato"/>
+                <a:ea typeface="Lato"/>
+                <a:cs typeface="Lato"/>
+                <a:sym typeface="Lato"/>
+              </a:rPr>
+              <a:t>App logs, ALB logs. High frequency, used for daily incidents.</a:t>
+            </a:r>
+            <a:endParaRPr/>
+          </a:p>
+        </p:txBody>
+      </p:sp>
+      <p:sp>
+        <p:nvSpPr>
+          <p:cNvPr id="154" name="Google Shape;154;p17"/>
+          <p:cNvSpPr txBox="1"/>
+          <p:nvPr/>
+        </p:nvSpPr>
+        <p:spPr>
+          <a:xfrm>
+            <a:off x="8413849" y="3576637"/>
+            <a:ext cx="3067102" cy="400050"/>
+          </a:xfrm>
+          <a:prstGeom prst="rect">
+            <a:avLst/>
+          </a:prstGeom>
+          <a:noFill/>
+          <a:ln>
+            <a:noFill/>
+          </a:ln>
+        </p:spPr>
+        <p:txBody>
+          <a:bodyPr spcFirstLastPara="1" wrap="square" lIns="0" tIns="0" rIns="0" bIns="0" anchor="t" anchorCtr="0">
+            <a:spAutoFit/>
+          </a:bodyPr>
+          <a:lstStyle/>
+          <a:p>
+            <a:pPr marL="0" marR="0" lvl="0" indent="0" algn="l" rtl="0">
+              <a:spcBef>
+                <a:spcPts val="0"/>
+              </a:spcBef>
+              <a:spcAft>
+                <a:spcPts val="0"/>
+              </a:spcAft>
+              <a:buNone/>
+            </a:pPr>
+            <a:r>
+              <a:rPr lang="en-US" sz="2100" b="1" i="0" u="none" strike="noStrike" cap="none">
+                <a:solidFill>
+                  <a:srgbClr val="0073BB"/>
+                </a:solidFill>
+                <a:latin typeface="Poppins"/>
+                <a:ea typeface="Poppins"/>
+                <a:cs typeface="Poppins"/>
+                <a:sym typeface="Poppins"/>
+              </a:rPr>
+              <a:t>Tier 3: Diagnostic</a:t>
+            </a:r>
+            <a:endParaRPr/>
+          </a:p>
+        </p:txBody>
+      </p:sp>
+      <p:sp>
+        <p:nvSpPr>
+          <p:cNvPr id="155" name="Google Shape;155;p17"/>
+          <p:cNvSpPr txBox="1"/>
+          <p:nvPr/>
+        </p:nvSpPr>
+        <p:spPr>
+          <a:xfrm>
+            <a:off x="8413849" y="4090987"/>
+            <a:ext cx="2921049" cy="533400"/>
+          </a:xfrm>
+          <a:prstGeom prst="rect">
+            <a:avLst/>
+          </a:prstGeom>
+          <a:noFill/>
+          <a:ln>
+            <a:noFill/>
+          </a:ln>
+        </p:spPr>
+        <p:txBody>
+          <a:bodyPr spcFirstLastPara="1" wrap="square" lIns="0" tIns="0" rIns="0" bIns="0" anchor="t" anchorCtr="0">
+            <a:spAutoFit/>
+          </a:bodyPr>
+          <a:lstStyle/>
+          <a:p>
+            <a:pPr marL="0" marR="0" lvl="0" indent="0" algn="l" rtl="0">
+              <a:lnSpc>
+                <a:spcPct val="140000"/>
+              </a:lnSpc>
+              <a:spcBef>
+                <a:spcPts val="0"/>
+              </a:spcBef>
+              <a:spcAft>
+                <a:spcPts val="0"/>
+              </a:spcAft>
+              <a:buNone/>
+            </a:pPr>
+            <a:r>
+              <a:rPr lang="en-US" sz="1500" b="0" i="0" u="none" strike="noStrike" cap="none">
+                <a:solidFill>
+                  <a:srgbClr val="444444"/>
+                </a:solidFill>
+                <a:latin typeface="Lato"/>
+                <a:ea typeface="Lato"/>
+                <a:cs typeface="Lato"/>
+                <a:sym typeface="Lato"/>
+              </a:rPr>
+              <a:t>Verbose debug output. Short retention (3-7 days), low value.</a:t>
+            </a:r>
+            <a:endParaRPr/>
+          </a:p>
+        </p:txBody>
+      </p:sp>
+      <p:pic>
+        <p:nvPicPr>
+          <p:cNvPr id="156" name="Google Shape;156;p17" descr="image.png"/>
+          <p:cNvPicPr preferRelativeResize="0"/>
+          <p:nvPr/>
+        </p:nvPicPr>
+        <p:blipFill rotWithShape="1">
+          <a:blip r:embed="rId7">
+            <a:alphaModFix/>
+          </a:blip>
+          <a:srcRect/>
+          <a:stretch/>
+        </p:blipFill>
+        <p:spPr>
+          <a:xfrm>
+            <a:off x="857250" y="3014662"/>
+            <a:ext cx="381000" cy="381000"/>
+          </a:xfrm>
+          <a:prstGeom prst="rect">
+            <a:avLst/>
+          </a:prstGeom>
+          <a:noFill/>
+          <a:ln>
+            <a:noFill/>
+          </a:ln>
+        </p:spPr>
+      </p:pic>
+      <p:pic>
+        <p:nvPicPr>
+          <p:cNvPr id="157" name="Google Shape;157;p17" descr="image.png"/>
+          <p:cNvPicPr preferRelativeResize="0"/>
+          <p:nvPr/>
+        </p:nvPicPr>
+        <p:blipFill rotWithShape="1">
+          <a:blip r:embed="rId8">
+            <a:alphaModFix/>
+          </a:blip>
+          <a:srcRect/>
+          <a:stretch/>
+        </p:blipFill>
+        <p:spPr>
+          <a:xfrm>
+            <a:off x="4635549" y="3014662"/>
+            <a:ext cx="381000" cy="381000"/>
+          </a:xfrm>
+          <a:prstGeom prst="rect">
+            <a:avLst/>
+          </a:prstGeom>
+          <a:noFill/>
+          <a:ln>
+            <a:noFill/>
+          </a:ln>
+        </p:spPr>
+      </p:pic>
+      <p:pic>
+        <p:nvPicPr>
+          <p:cNvPr id="158" name="Google Shape;158;p17" descr="image.png"/>
+          <p:cNvPicPr preferRelativeResize="0"/>
+          <p:nvPr/>
+        </p:nvPicPr>
+        <p:blipFill rotWithShape="1">
+          <a:blip r:embed="rId9">
+            <a:alphaModFix/>
+          </a:blip>
+          <a:srcRect/>
+          <a:stretch/>
+        </p:blipFill>
+        <p:spPr>
+          <a:xfrm>
+            <a:off x="8413849" y="3014662"/>
+            <a:ext cx="381000" cy="381000"/>
+          </a:xfrm>
+          <a:prstGeom prst="rect">
+            <a:avLst/>
+          </a:prstGeom>
+          <a:noFill/>
+          <a:ln>
+            <a:noFill/>
+          </a:ln>
+        </p:spPr>
+      </p:pic>
+      <p:sp>
+        <p:nvSpPr>
+          <p:cNvPr id="159" name="Google Shape;159;p17"/>
+          <p:cNvSpPr txBox="1"/>
+          <p:nvPr/>
+        </p:nvSpPr>
+        <p:spPr>
+          <a:xfrm>
+            <a:off x="762000" y="571500"/>
+            <a:ext cx="11401500" cy="715800"/>
+          </a:xfrm>
+          <a:prstGeom prst="rect">
+            <a:avLst/>
+          </a:prstGeom>
+          <a:noFill/>
+          <a:ln>
+            <a:noFill/>
+          </a:ln>
+        </p:spPr>
+        <p:txBody>
+          <a:bodyPr spcFirstLastPara="1" wrap="square" lIns="0" tIns="0" rIns="0" bIns="0" anchor="t" anchorCtr="0">
+            <a:spAutoFit/>
+          </a:bodyPr>
+          <a:lstStyle/>
+          <a:p>
+            <a:pPr marL="0" marR="0" lvl="0" indent="0" algn="l" rtl="0">
+              <a:spcBef>
+                <a:spcPts val="0"/>
+              </a:spcBef>
+              <a:spcAft>
+                <a:spcPts val="0"/>
+              </a:spcAft>
+              <a:buNone/>
+            </a:pPr>
+            <a:r>
+              <a:rPr lang="en-US" sz="2850" b="1" i="0" u="none" strike="noStrike" cap="none">
+                <a:solidFill>
+                  <a:srgbClr val="232F3E"/>
+                </a:solidFill>
+                <a:latin typeface="Poppins"/>
+                <a:ea typeface="Poppins"/>
+                <a:cs typeface="Poppins"/>
+                <a:sym typeface="Poppins"/>
+              </a:rPr>
+              <a:t>The Three-Tier Log Hierarchy </a:t>
+            </a:r>
+            <a:endParaRPr sz="2850" b="1">
+              <a:solidFill>
+                <a:srgbClr val="232F3E"/>
+              </a:solidFill>
+              <a:latin typeface="Poppins"/>
+              <a:ea typeface="Poppins"/>
+              <a:cs typeface="Poppins"/>
+              <a:sym typeface="Poppins"/>
+            </a:endParaRPr>
+          </a:p>
+          <a:p>
+            <a:pPr marL="0" marR="0" lvl="0" indent="0" algn="l" rtl="0">
+              <a:spcBef>
+                <a:spcPts val="0"/>
+              </a:spcBef>
+              <a:spcAft>
+                <a:spcPts val="0"/>
+              </a:spcAft>
+              <a:buNone/>
+            </a:pPr>
+            <a:r>
+              <a:rPr lang="en-US" sz="1800">
+                <a:solidFill>
+                  <a:srgbClr val="232F3E"/>
+                </a:solidFill>
+                <a:latin typeface="Poppins"/>
+                <a:ea typeface="Poppins"/>
+                <a:cs typeface="Poppins"/>
+                <a:sym typeface="Poppins"/>
+              </a:rPr>
+              <a:t>Organizing and dividing logs</a:t>
+            </a:r>
+            <a:endParaRPr sz="1800">
+              <a:solidFill>
+                <a:srgbClr val="232F3E"/>
+              </a:solidFill>
+              <a:latin typeface="Poppins"/>
+              <a:ea typeface="Poppins"/>
+              <a:cs typeface="Poppins"/>
+              <a:sym typeface="Poppins"/>
+            </a:endParaRPr>
+          </a:p>
+        </p:txBody>
+      </p:sp>
+      <p:sp>
+        <p:nvSpPr>
+          <p:cNvPr id="160" name="Google Shape;160;p17"/>
+          <p:cNvSpPr/>
+          <p:nvPr/>
+        </p:nvSpPr>
+        <p:spPr>
+          <a:xfrm>
+            <a:off x="571500" y="571500"/>
+            <a:ext cx="57150" cy="542925"/>
+          </a:xfrm>
+          <a:prstGeom prst="rect">
+            <a:avLst/>
+          </a:prstGeom>
+          <a:solidFill>
+            <a:srgbClr val="FF9900"/>
+          </a:solidFill>
+          <a:ln>
+            <a:noFill/>
+          </a:ln>
+        </p:spPr>
+        <p:txBody>
+          <a:bodyPr spcFirstLastPara="1" wrap="square" lIns="91425" tIns="45700" rIns="91425" bIns="45700" anchor="ctr" anchorCtr="0">
+            <a:noAutofit/>
+          </a:bodyPr>
+          <a:lstStyle/>
+          <a:p>
+            <a:pPr marL="0" marR="0" lvl="0" indent="0" algn="ctr" rtl="0">
+              <a:spcBef>
+                <a:spcPts val="0"/>
+              </a:spcBef>
+              <a:spcAft>
+                <a:spcPts val="0"/>
+              </a:spcAft>
+              <a:buNone/>
+            </a:pPr>
+            <a:endParaRPr sz="1800" b="0" i="0" u="none" strike="noStrike" cap="none">
+              <a:solidFill>
+                <a:schemeClr val="dk1"/>
+              </a:solidFill>
+              <a:latin typeface="Calibri"/>
+              <a:ea typeface="Calibri"/>
+              <a:cs typeface="Calibri"/>
+              <a:sym typeface="Calibri"/>
+            </a:endParaRPr>
+          </a:p>
+        </p:txBody>
+      </p:sp>
+    </p:spTree>
+    <p:extLst>
+      <p:ext uri="{BB962C8B-B14F-4D97-AF65-F5344CB8AC3E}">
+        <p14:creationId xmlns:p14="http://schemas.microsoft.com/office/powerpoint/2010/main" val="3989971602"/>
+      </p:ext>
+    </p:extLst>
+  </p:cSld>
+  <p:clrMapOvr>
+    <a:masterClrMapping/>
+  </p:clrMapOvr>
+</p:sld>
+</file>
+
+<file path=ppt/slides/slide8.xml><?xml version="1.0" encoding="utf-8"?>
 <p:sld xmlns:a="http://schemas.openxmlformats.org/drawingml/2006/main" xmlns:r="http://schemas.openxmlformats.org/officeDocument/2006/relationships" xmlns:p="http://schemas.openxmlformats.org/presentationml/2006/main">
   <p:cSld>
     <p:bg>
@@ -18661,7 +20824,7 @@
 </p:sld>
 </file>
 
-<file path=ppt/slides/slide7.xml><?xml version="1.0" encoding="utf-8"?>
+<file path=ppt/slides/slide9.xml><?xml version="1.0" encoding="utf-8"?>
 <p:sld xmlns:a="http://schemas.openxmlformats.org/drawingml/2006/main" xmlns:r="http://schemas.openxmlformats.org/officeDocument/2006/relationships" xmlns:p="http://schemas.openxmlformats.org/presentationml/2006/main">
   <p:cSld>
     <p:bg>
@@ -20641,874 +22804,6 @@
 </p:sld>
 </file>
 
-<file path=ppt/slides/slide8.xml><?xml version="1.0" encoding="utf-8"?>
-<p:sld xmlns:a="http://schemas.openxmlformats.org/drawingml/2006/main" xmlns:r="http://schemas.openxmlformats.org/officeDocument/2006/relationships" xmlns:p="http://schemas.openxmlformats.org/presentationml/2006/main">
-  <p:cSld>
-    <p:bg>
-      <p:bgPr>
-        <a:solidFill>
-          <a:srgbClr val="FFFFFF"/>
-        </a:solidFill>
-        <a:effectLst/>
-      </p:bgPr>
-    </p:bg>
-    <p:spTree>
-      <p:nvGrpSpPr>
-        <p:cNvPr id="1" name="Shape 196"/>
-        <p:cNvGrpSpPr/>
-        <p:nvPr/>
-      </p:nvGrpSpPr>
-      <p:grpSpPr>
-        <a:xfrm>
-          <a:off x="0" y="0"/>
-          <a:ext cx="0" cy="0"/>
-          <a:chOff x="0" y="0"/>
-          <a:chExt cx="0" cy="0"/>
-        </a:xfrm>
-      </p:grpSpPr>
-      <p:pic>
-        <p:nvPicPr>
-          <p:cNvPr id="197" name="Google Shape;197;p20" descr="image.png"/>
-          <p:cNvPicPr preferRelativeResize="0"/>
-          <p:nvPr/>
-        </p:nvPicPr>
-        <p:blipFill rotWithShape="1">
-          <a:blip r:embed="rId3">
-            <a:alphaModFix/>
-          </a:blip>
-          <a:srcRect/>
-          <a:stretch/>
-        </p:blipFill>
-        <p:spPr>
-          <a:xfrm>
-            <a:off x="0" y="0"/>
-            <a:ext cx="12192000" cy="6858000"/>
-          </a:xfrm>
-          <a:prstGeom prst="rect">
-            <a:avLst/>
-          </a:prstGeom>
-          <a:noFill/>
-          <a:ln>
-            <a:noFill/>
-          </a:ln>
-        </p:spPr>
-      </p:pic>
-      <p:pic>
-        <p:nvPicPr>
-          <p:cNvPr id="198" name="Google Shape;198;p20" descr="image.png"/>
-          <p:cNvPicPr preferRelativeResize="0"/>
-          <p:nvPr/>
-        </p:nvPicPr>
-        <p:blipFill rotWithShape="1">
-          <a:blip r:embed="rId4">
-            <a:alphaModFix/>
-          </a:blip>
-          <a:srcRect/>
-          <a:stretch/>
-        </p:blipFill>
-        <p:spPr>
-          <a:xfrm>
-            <a:off x="6286500" y="1985962"/>
-            <a:ext cx="5334000" cy="3810000"/>
-          </a:xfrm>
-          <a:prstGeom prst="rect">
-            <a:avLst/>
-          </a:prstGeom>
-          <a:noFill/>
-          <a:ln>
-            <a:noFill/>
-          </a:ln>
-        </p:spPr>
-      </p:pic>
-      <p:sp>
-        <p:nvSpPr>
-          <p:cNvPr id="199" name="Google Shape;199;p20"/>
-          <p:cNvSpPr txBox="1"/>
-          <p:nvPr/>
-        </p:nvSpPr>
-        <p:spPr>
-          <a:xfrm>
-            <a:off x="571500" y="3214687"/>
-            <a:ext cx="5334000" cy="533400"/>
-          </a:xfrm>
-          <a:prstGeom prst="rect">
-            <a:avLst/>
-          </a:prstGeom>
-          <a:noFill/>
-          <a:ln>
-            <a:noFill/>
-          </a:ln>
-        </p:spPr>
-        <p:txBody>
-          <a:bodyPr spcFirstLastPara="1" wrap="square" lIns="0" tIns="0" rIns="0" bIns="0" anchor="t" anchorCtr="0">
-            <a:spAutoFit/>
-          </a:bodyPr>
-          <a:lstStyle/>
-          <a:p>
-            <a:pPr marL="0" marR="0" lvl="0" indent="0" algn="l" rtl="0">
-              <a:lnSpc>
-                <a:spcPct val="140000"/>
-              </a:lnSpc>
-              <a:spcBef>
-                <a:spcPts val="0"/>
-              </a:spcBef>
-              <a:spcAft>
-                <a:spcPts val="0"/>
-              </a:spcAft>
-              <a:buNone/>
-            </a:pPr>
-            <a:r>
-              <a:rPr lang="en-US" sz="1500" b="0" i="0" u="none" strike="noStrike" cap="none">
-                <a:solidFill>
-                  <a:srgbClr val="444444"/>
-                </a:solidFill>
-                <a:latin typeface="Lato"/>
-                <a:ea typeface="Lato"/>
-                <a:cs typeface="Lato"/>
-                <a:sym typeface="Lato"/>
-              </a:rPr>
-              <a:t>Storing logs is not monitoring. Monitoring is the active process of extracting signal from raw data.</a:t>
-            </a:r>
-            <a:endParaRPr/>
-          </a:p>
-        </p:txBody>
-      </p:sp>
-      <p:sp>
-        <p:nvSpPr>
-          <p:cNvPr id="200" name="Google Shape;200;p20"/>
-          <p:cNvSpPr txBox="1"/>
-          <p:nvPr/>
-        </p:nvSpPr>
-        <p:spPr>
-          <a:xfrm>
-            <a:off x="571500" y="3890962"/>
-            <a:ext cx="5334000" cy="533400"/>
-          </a:xfrm>
-          <a:prstGeom prst="rect">
-            <a:avLst/>
-          </a:prstGeom>
-          <a:noFill/>
-          <a:ln>
-            <a:noFill/>
-          </a:ln>
-        </p:spPr>
-        <p:txBody>
-          <a:bodyPr spcFirstLastPara="1" wrap="square" lIns="0" tIns="0" rIns="0" bIns="0" anchor="t" anchorCtr="0">
-            <a:spAutoFit/>
-          </a:bodyPr>
-          <a:lstStyle/>
-          <a:p>
-            <a:pPr marL="0" marR="0" lvl="0" indent="0" algn="l" rtl="0">
-              <a:lnSpc>
-                <a:spcPct val="140000"/>
-              </a:lnSpc>
-              <a:spcBef>
-                <a:spcPts val="0"/>
-              </a:spcBef>
-              <a:spcAft>
-                <a:spcPts val="0"/>
-              </a:spcAft>
-              <a:buNone/>
-            </a:pPr>
-            <a:r>
-              <a:rPr lang="en-US" sz="1500" b="0" i="0" u="none" strike="noStrike" cap="none">
-                <a:solidFill>
-                  <a:srgbClr val="444444"/>
-                </a:solidFill>
-                <a:latin typeface="Lato"/>
-                <a:ea typeface="Lato"/>
-                <a:cs typeface="Lato"/>
-                <a:sym typeface="Lato"/>
-              </a:rPr>
-              <a:t>Avoid </a:t>
-            </a:r>
-            <a:r>
-              <a:rPr lang="en-US" sz="1500" b="1" i="0" u="none" strike="noStrike" cap="none">
-                <a:solidFill>
-                  <a:srgbClr val="444444"/>
-                </a:solidFill>
-                <a:latin typeface="Lato"/>
-                <a:ea typeface="Lato"/>
-                <a:cs typeface="Lato"/>
-                <a:sym typeface="Lato"/>
-              </a:rPr>
-              <a:t>Silent Failures</a:t>
-            </a:r>
-            <a:r>
-              <a:rPr lang="en-US" sz="1500" b="0" i="0" u="none" strike="noStrike" cap="none">
-                <a:solidFill>
-                  <a:srgbClr val="444444"/>
-                </a:solidFill>
-                <a:latin typeface="Lato"/>
-                <a:ea typeface="Lato"/>
-                <a:cs typeface="Lato"/>
-                <a:sym typeface="Lato"/>
-              </a:rPr>
-              <a:t>: Users might report "broken" features for weeks before a bug is found if alerts only track CPU/Memory.</a:t>
-            </a:r>
-            <a:endParaRPr/>
-          </a:p>
-        </p:txBody>
-      </p:sp>
-      <p:pic>
-        <p:nvPicPr>
-          <p:cNvPr id="201" name="Google Shape;201;p20" descr="image.png"/>
-          <p:cNvPicPr preferRelativeResize="0"/>
-          <p:nvPr/>
-        </p:nvPicPr>
-        <p:blipFill rotWithShape="1">
-          <a:blip r:embed="rId5">
-            <a:alphaModFix/>
-          </a:blip>
-          <a:srcRect/>
-          <a:stretch/>
-        </p:blipFill>
-        <p:spPr>
-          <a:xfrm>
-            <a:off x="7239000" y="2176462"/>
-            <a:ext cx="3429000" cy="3429000"/>
-          </a:xfrm>
-          <a:prstGeom prst="rect">
-            <a:avLst/>
-          </a:prstGeom>
-          <a:noFill/>
-          <a:ln>
-            <a:noFill/>
-          </a:ln>
-        </p:spPr>
-      </p:pic>
-      <p:sp>
-        <p:nvSpPr>
-          <p:cNvPr id="202" name="Google Shape;202;p20"/>
-          <p:cNvSpPr txBox="1"/>
-          <p:nvPr/>
-        </p:nvSpPr>
-        <p:spPr>
-          <a:xfrm>
-            <a:off x="762000" y="571500"/>
-            <a:ext cx="11401425" cy="542925"/>
-          </a:xfrm>
-          <a:prstGeom prst="rect">
-            <a:avLst/>
-          </a:prstGeom>
-          <a:noFill/>
-          <a:ln>
-            <a:noFill/>
-          </a:ln>
-        </p:spPr>
-        <p:txBody>
-          <a:bodyPr spcFirstLastPara="1" wrap="square" lIns="0" tIns="0" rIns="0" bIns="0" anchor="t" anchorCtr="0">
-            <a:spAutoFit/>
-          </a:bodyPr>
-          <a:lstStyle/>
-          <a:p>
-            <a:pPr marL="0" marR="0" lvl="0" indent="0" algn="l" rtl="0">
-              <a:spcBef>
-                <a:spcPts val="0"/>
-              </a:spcBef>
-              <a:spcAft>
-                <a:spcPts val="0"/>
-              </a:spcAft>
-              <a:buNone/>
-            </a:pPr>
-            <a:r>
-              <a:rPr lang="en-US" sz="2850" b="1" i="0" u="none" strike="noStrike" cap="none">
-                <a:solidFill>
-                  <a:srgbClr val="232F3E"/>
-                </a:solidFill>
-                <a:latin typeface="Poppins"/>
-                <a:ea typeface="Poppins"/>
-                <a:cs typeface="Poppins"/>
-                <a:sym typeface="Poppins"/>
-              </a:rPr>
-              <a:t>Monitoring: Data to Signal</a:t>
-            </a:r>
-            <a:endParaRPr/>
-          </a:p>
-        </p:txBody>
-      </p:sp>
-      <p:sp>
-        <p:nvSpPr>
-          <p:cNvPr id="203" name="Google Shape;203;p20"/>
-          <p:cNvSpPr/>
-          <p:nvPr/>
-        </p:nvSpPr>
-        <p:spPr>
-          <a:xfrm>
-            <a:off x="571500" y="571500"/>
-            <a:ext cx="57150" cy="542925"/>
-          </a:xfrm>
-          <a:prstGeom prst="rect">
-            <a:avLst/>
-          </a:prstGeom>
-          <a:solidFill>
-            <a:srgbClr val="FF9900"/>
-          </a:solidFill>
-          <a:ln>
-            <a:noFill/>
-          </a:ln>
-        </p:spPr>
-        <p:txBody>
-          <a:bodyPr spcFirstLastPara="1" wrap="square" lIns="91425" tIns="45700" rIns="91425" bIns="45700" anchor="ctr" anchorCtr="0">
-            <a:noAutofit/>
-          </a:bodyPr>
-          <a:lstStyle/>
-          <a:p>
-            <a:pPr marL="0" marR="0" lvl="0" indent="0" algn="ctr" rtl="0">
-              <a:spcBef>
-                <a:spcPts val="0"/>
-              </a:spcBef>
-              <a:spcAft>
-                <a:spcPts val="0"/>
-              </a:spcAft>
-              <a:buNone/>
-            </a:pPr>
-            <a:endParaRPr sz="1800" b="0" i="0" u="none" strike="noStrike" cap="none">
-              <a:solidFill>
-                <a:schemeClr val="dk1"/>
-              </a:solidFill>
-              <a:latin typeface="Calibri"/>
-              <a:ea typeface="Calibri"/>
-              <a:cs typeface="Calibri"/>
-              <a:sym typeface="Calibri"/>
-            </a:endParaRPr>
-          </a:p>
-        </p:txBody>
-      </p:sp>
-    </p:spTree>
-  </p:cSld>
-  <p:clrMapOvr>
-    <a:masterClrMapping/>
-  </p:clrMapOvr>
-</p:sld>
-</file>
-
-<file path=ppt/slides/slide9.xml><?xml version="1.0" encoding="utf-8"?>
-<p:sld xmlns:a="http://schemas.openxmlformats.org/drawingml/2006/main" xmlns:r="http://schemas.openxmlformats.org/officeDocument/2006/relationships" xmlns:p="http://schemas.openxmlformats.org/presentationml/2006/main">
-  <p:cSld>
-    <p:bg>
-      <p:bgPr>
-        <a:solidFill>
-          <a:srgbClr val="FFFFFF"/>
-        </a:solidFill>
-        <a:effectLst/>
-      </p:bgPr>
-    </p:bg>
-    <p:spTree>
-      <p:nvGrpSpPr>
-        <p:cNvPr id="1" name="Shape 207"/>
-        <p:cNvGrpSpPr/>
-        <p:nvPr/>
-      </p:nvGrpSpPr>
-      <p:grpSpPr>
-        <a:xfrm>
-          <a:off x="0" y="0"/>
-          <a:ext cx="0" cy="0"/>
-          <a:chOff x="0" y="0"/>
-          <a:chExt cx="0" cy="0"/>
-        </a:xfrm>
-      </p:grpSpPr>
-      <p:pic>
-        <p:nvPicPr>
-          <p:cNvPr id="208" name="Google Shape;208;p21" descr="image.png"/>
-          <p:cNvPicPr preferRelativeResize="0"/>
-          <p:nvPr/>
-        </p:nvPicPr>
-        <p:blipFill rotWithShape="1">
-          <a:blip r:embed="rId3">
-            <a:alphaModFix/>
-          </a:blip>
-          <a:srcRect/>
-          <a:stretch/>
-        </p:blipFill>
-        <p:spPr>
-          <a:xfrm>
-            <a:off x="0" y="0"/>
-            <a:ext cx="12192000" cy="6858000"/>
-          </a:xfrm>
-          <a:prstGeom prst="rect">
-            <a:avLst/>
-          </a:prstGeom>
-          <a:noFill/>
-          <a:ln>
-            <a:noFill/>
-          </a:ln>
-        </p:spPr>
-      </p:pic>
-      <p:sp>
-        <p:nvSpPr>
-          <p:cNvPr id="209" name="Google Shape;209;p21"/>
-          <p:cNvSpPr txBox="1"/>
-          <p:nvPr/>
-        </p:nvSpPr>
-        <p:spPr>
-          <a:xfrm>
-            <a:off x="1381125" y="3052762"/>
-            <a:ext cx="10239375" cy="266700"/>
-          </a:xfrm>
-          <a:prstGeom prst="rect">
-            <a:avLst/>
-          </a:prstGeom>
-          <a:noFill/>
-          <a:ln>
-            <a:noFill/>
-          </a:ln>
-        </p:spPr>
-        <p:txBody>
-          <a:bodyPr spcFirstLastPara="1" wrap="square" lIns="0" tIns="0" rIns="0" bIns="0" anchor="t" anchorCtr="0">
-            <a:spAutoFit/>
-          </a:bodyPr>
-          <a:lstStyle/>
-          <a:p>
-            <a:pPr marL="0" marR="0" lvl="0" indent="0" algn="l" rtl="0">
-              <a:lnSpc>
-                <a:spcPct val="140000"/>
-              </a:lnSpc>
-              <a:spcBef>
-                <a:spcPts val="0"/>
-              </a:spcBef>
-              <a:spcAft>
-                <a:spcPts val="0"/>
-              </a:spcAft>
-              <a:buNone/>
-            </a:pPr>
-            <a:r>
-              <a:rPr lang="en-US" sz="1500" b="1" i="0" u="none" strike="noStrike" cap="none">
-                <a:solidFill>
-                  <a:srgbClr val="444444"/>
-                </a:solidFill>
-                <a:latin typeface="Lato"/>
-                <a:ea typeface="Lato"/>
-                <a:cs typeface="Lato"/>
-                <a:sym typeface="Lato"/>
-              </a:rPr>
-              <a:t>HTTP 5xx Errors:</a:t>
-            </a:r>
-            <a:r>
-              <a:rPr lang="en-US" sz="1500" b="0" i="0" u="none" strike="noStrike" cap="none">
-                <a:solidFill>
-                  <a:srgbClr val="444444"/>
-                </a:solidFill>
-                <a:latin typeface="Lato"/>
-                <a:ea typeface="Lato"/>
-                <a:cs typeface="Lato"/>
-                <a:sym typeface="Lato"/>
-              </a:rPr>
-              <a:t> Track server-side crashes to trigger P1 alerts immediately.</a:t>
-            </a:r>
-            <a:endParaRPr/>
-          </a:p>
-        </p:txBody>
-      </p:sp>
-      <p:sp>
-        <p:nvSpPr>
-          <p:cNvPr id="210" name="Google Shape;210;p21"/>
-          <p:cNvSpPr txBox="1"/>
-          <p:nvPr/>
-        </p:nvSpPr>
-        <p:spPr>
-          <a:xfrm>
-            <a:off x="1381125" y="3509962"/>
-            <a:ext cx="10239375" cy="266700"/>
-          </a:xfrm>
-          <a:prstGeom prst="rect">
-            <a:avLst/>
-          </a:prstGeom>
-          <a:noFill/>
-          <a:ln>
-            <a:noFill/>
-          </a:ln>
-        </p:spPr>
-        <p:txBody>
-          <a:bodyPr spcFirstLastPara="1" wrap="square" lIns="0" tIns="0" rIns="0" bIns="0" anchor="t" anchorCtr="0">
-            <a:spAutoFit/>
-          </a:bodyPr>
-          <a:lstStyle/>
-          <a:p>
-            <a:pPr marL="0" marR="0" lvl="0" indent="0" algn="l" rtl="0">
-              <a:lnSpc>
-                <a:spcPct val="140000"/>
-              </a:lnSpc>
-              <a:spcBef>
-                <a:spcPts val="0"/>
-              </a:spcBef>
-              <a:spcAft>
-                <a:spcPts val="0"/>
-              </a:spcAft>
-              <a:buNone/>
-            </a:pPr>
-            <a:r>
-              <a:rPr lang="en-US" sz="1500" b="1" i="0" u="none" strike="noStrike" cap="none">
-                <a:solidFill>
-                  <a:srgbClr val="444444"/>
-                </a:solidFill>
-                <a:latin typeface="Lato"/>
-                <a:ea typeface="Lato"/>
-                <a:cs typeface="Lato"/>
-                <a:sym typeface="Lato"/>
-              </a:rPr>
-              <a:t>Lambda Cold Starts:</a:t>
-            </a:r>
-            <a:r>
-              <a:rPr lang="en-US" sz="1500" b="0" i="0" u="none" strike="noStrike" cap="none">
-                <a:solidFill>
-                  <a:srgbClr val="444444"/>
-                </a:solidFill>
-                <a:latin typeface="Lato"/>
-                <a:ea typeface="Lato"/>
-                <a:cs typeface="Lato"/>
-                <a:sym typeface="Lato"/>
-              </a:rPr>
-              <a:t> Monitor init duration patterns to optimize performance.</a:t>
-            </a:r>
-            <a:endParaRPr/>
-          </a:p>
-        </p:txBody>
-      </p:sp>
-      <p:sp>
-        <p:nvSpPr>
-          <p:cNvPr id="211" name="Google Shape;211;p21"/>
-          <p:cNvSpPr txBox="1"/>
-          <p:nvPr/>
-        </p:nvSpPr>
-        <p:spPr>
-          <a:xfrm>
-            <a:off x="1381125" y="3967162"/>
-            <a:ext cx="10239375" cy="266700"/>
-          </a:xfrm>
-          <a:prstGeom prst="rect">
-            <a:avLst/>
-          </a:prstGeom>
-          <a:noFill/>
-          <a:ln>
-            <a:noFill/>
-          </a:ln>
-        </p:spPr>
-        <p:txBody>
-          <a:bodyPr spcFirstLastPara="1" wrap="square" lIns="0" tIns="0" rIns="0" bIns="0" anchor="t" anchorCtr="0">
-            <a:spAutoFit/>
-          </a:bodyPr>
-          <a:lstStyle/>
-          <a:p>
-            <a:pPr marL="0" marR="0" lvl="0" indent="0" algn="l" rtl="0">
-              <a:lnSpc>
-                <a:spcPct val="140000"/>
-              </a:lnSpc>
-              <a:spcBef>
-                <a:spcPts val="0"/>
-              </a:spcBef>
-              <a:spcAft>
-                <a:spcPts val="0"/>
-              </a:spcAft>
-              <a:buNone/>
-            </a:pPr>
-            <a:r>
-              <a:rPr lang="en-US" sz="1500" b="1" i="0" u="none" strike="noStrike" cap="none">
-                <a:solidFill>
-                  <a:srgbClr val="444444"/>
-                </a:solidFill>
-                <a:latin typeface="Lato"/>
-                <a:ea typeface="Lato"/>
-                <a:cs typeface="Lato"/>
-                <a:sym typeface="Lato"/>
-              </a:rPr>
-              <a:t>IAM AccessDenied:</a:t>
-            </a:r>
-            <a:r>
-              <a:rPr lang="en-US" sz="1500" b="0" i="0" u="none" strike="noStrike" cap="none">
-                <a:solidFill>
-                  <a:srgbClr val="444444"/>
-                </a:solidFill>
-                <a:latin typeface="Lato"/>
-                <a:ea typeface="Lato"/>
-                <a:cs typeface="Lato"/>
-                <a:sym typeface="Lato"/>
-              </a:rPr>
-              <a:t> Detect credential compromise or misconfigurations in real-time.</a:t>
-            </a:r>
-            <a:endParaRPr/>
-          </a:p>
-        </p:txBody>
-      </p:sp>
-      <p:sp>
-        <p:nvSpPr>
-          <p:cNvPr id="212" name="Google Shape;212;p21"/>
-          <p:cNvSpPr txBox="1"/>
-          <p:nvPr/>
-        </p:nvSpPr>
-        <p:spPr>
-          <a:xfrm>
-            <a:off x="1381125" y="4424362"/>
-            <a:ext cx="10239375" cy="266700"/>
-          </a:xfrm>
-          <a:prstGeom prst="rect">
-            <a:avLst/>
-          </a:prstGeom>
-          <a:noFill/>
-          <a:ln>
-            <a:noFill/>
-          </a:ln>
-        </p:spPr>
-        <p:txBody>
-          <a:bodyPr spcFirstLastPara="1" wrap="square" lIns="0" tIns="0" rIns="0" bIns="0" anchor="t" anchorCtr="0">
-            <a:spAutoFit/>
-          </a:bodyPr>
-          <a:lstStyle/>
-          <a:p>
-            <a:pPr marL="0" marR="0" lvl="0" indent="0" algn="l" rtl="0">
-              <a:lnSpc>
-                <a:spcPct val="140000"/>
-              </a:lnSpc>
-              <a:spcBef>
-                <a:spcPts val="0"/>
-              </a:spcBef>
-              <a:spcAft>
-                <a:spcPts val="0"/>
-              </a:spcAft>
-              <a:buNone/>
-            </a:pPr>
-            <a:r>
-              <a:rPr lang="en-US" sz="1500" b="1" i="0" u="none" strike="noStrike" cap="none">
-                <a:solidFill>
-                  <a:srgbClr val="444444"/>
-                </a:solidFill>
-                <a:latin typeface="Lato"/>
-                <a:ea typeface="Lato"/>
-                <a:cs typeface="Lato"/>
-                <a:sym typeface="Lato"/>
-              </a:rPr>
-              <a:t>Ingestion Drops:</a:t>
-            </a:r>
-            <a:r>
-              <a:rPr lang="en-US" sz="1500" b="0" i="0" u="none" strike="noStrike" cap="none">
-                <a:solidFill>
-                  <a:srgbClr val="444444"/>
-                </a:solidFill>
-                <a:latin typeface="Lato"/>
-                <a:ea typeface="Lato"/>
-                <a:cs typeface="Lato"/>
-                <a:sym typeface="Lato"/>
-              </a:rPr>
-              <a:t> Alert if log flow stops, indicating a broken agent or pipeline.</a:t>
-            </a:r>
-            <a:endParaRPr/>
-          </a:p>
-        </p:txBody>
-      </p:sp>
-      <p:pic>
-        <p:nvPicPr>
-          <p:cNvPr id="213" name="Google Shape;213;p21" descr="image.png"/>
-          <p:cNvPicPr preferRelativeResize="0"/>
-          <p:nvPr/>
-        </p:nvPicPr>
-        <p:blipFill rotWithShape="1">
-          <a:blip r:embed="rId4">
-            <a:alphaModFix/>
-          </a:blip>
-          <a:srcRect/>
-          <a:stretch/>
-        </p:blipFill>
-        <p:spPr>
-          <a:xfrm>
-            <a:off x="952500" y="3081337"/>
-            <a:ext cx="228600" cy="247650"/>
-          </a:xfrm>
-          <a:prstGeom prst="rect">
-            <a:avLst/>
-          </a:prstGeom>
-          <a:noFill/>
-          <a:ln>
-            <a:noFill/>
-          </a:ln>
-        </p:spPr>
-      </p:pic>
-      <p:pic>
-        <p:nvPicPr>
-          <p:cNvPr id="214" name="Google Shape;214;p21" descr="image.png"/>
-          <p:cNvPicPr preferRelativeResize="0"/>
-          <p:nvPr/>
-        </p:nvPicPr>
-        <p:blipFill rotWithShape="1">
-          <a:blip r:embed="rId5">
-            <a:alphaModFix/>
-          </a:blip>
-          <a:srcRect/>
-          <a:stretch/>
-        </p:blipFill>
-        <p:spPr>
-          <a:xfrm>
-            <a:off x="952500" y="3538537"/>
-            <a:ext cx="200025" cy="247650"/>
-          </a:xfrm>
-          <a:prstGeom prst="rect">
-            <a:avLst/>
-          </a:prstGeom>
-          <a:noFill/>
-          <a:ln>
-            <a:noFill/>
-          </a:ln>
-        </p:spPr>
-      </p:pic>
-      <p:pic>
-        <p:nvPicPr>
-          <p:cNvPr id="215" name="Google Shape;215;p21" descr="image.png"/>
-          <p:cNvPicPr preferRelativeResize="0"/>
-          <p:nvPr/>
-        </p:nvPicPr>
-        <p:blipFill rotWithShape="1">
-          <a:blip r:embed="rId6">
-            <a:alphaModFix/>
-          </a:blip>
-          <a:srcRect/>
-          <a:stretch/>
-        </p:blipFill>
-        <p:spPr>
-          <a:xfrm>
-            <a:off x="952500" y="3995737"/>
-            <a:ext cx="285750" cy="247650"/>
-          </a:xfrm>
-          <a:prstGeom prst="rect">
-            <a:avLst/>
-          </a:prstGeom>
-          <a:noFill/>
-          <a:ln>
-            <a:noFill/>
-          </a:ln>
-        </p:spPr>
-      </p:pic>
-      <p:pic>
-        <p:nvPicPr>
-          <p:cNvPr id="216" name="Google Shape;216;p21" descr="image.png"/>
-          <p:cNvPicPr preferRelativeResize="0"/>
-          <p:nvPr/>
-        </p:nvPicPr>
-        <p:blipFill rotWithShape="1">
-          <a:blip r:embed="rId7">
-            <a:alphaModFix/>
-          </a:blip>
-          <a:srcRect/>
-          <a:stretch/>
-        </p:blipFill>
-        <p:spPr>
-          <a:xfrm>
-            <a:off x="952500" y="4452937"/>
-            <a:ext cx="228600" cy="247650"/>
-          </a:xfrm>
-          <a:prstGeom prst="rect">
-            <a:avLst/>
-          </a:prstGeom>
-          <a:noFill/>
-          <a:ln>
-            <a:noFill/>
-          </a:ln>
-        </p:spPr>
-      </p:pic>
-      <p:sp>
-        <p:nvSpPr>
-          <p:cNvPr id="217" name="Google Shape;217;p21"/>
-          <p:cNvSpPr txBox="1"/>
-          <p:nvPr/>
-        </p:nvSpPr>
-        <p:spPr>
-          <a:xfrm>
-            <a:off x="762000" y="571500"/>
-            <a:ext cx="11401425" cy="542925"/>
-          </a:xfrm>
-          <a:prstGeom prst="rect">
-            <a:avLst/>
-          </a:prstGeom>
-          <a:noFill/>
-          <a:ln>
-            <a:noFill/>
-          </a:ln>
-        </p:spPr>
-        <p:txBody>
-          <a:bodyPr spcFirstLastPara="1" wrap="square" lIns="0" tIns="0" rIns="0" bIns="0" anchor="t" anchorCtr="0">
-            <a:spAutoFit/>
-          </a:bodyPr>
-          <a:lstStyle/>
-          <a:p>
-            <a:pPr marL="0" marR="0" lvl="0" indent="0" algn="l" rtl="0">
-              <a:spcBef>
-                <a:spcPts val="0"/>
-              </a:spcBef>
-              <a:spcAft>
-                <a:spcPts val="0"/>
-              </a:spcAft>
-              <a:buNone/>
-            </a:pPr>
-            <a:r>
-              <a:rPr lang="en-US" sz="2850" b="1" i="0" u="none" strike="noStrike" cap="none">
-                <a:solidFill>
-                  <a:srgbClr val="232F3E"/>
-                </a:solidFill>
-                <a:latin typeface="Poppins"/>
-                <a:ea typeface="Poppins"/>
-                <a:cs typeface="Poppins"/>
-                <a:sym typeface="Poppins"/>
-              </a:rPr>
-              <a:t>Metric Filters to Implement</a:t>
-            </a:r>
-            <a:endParaRPr/>
-          </a:p>
-        </p:txBody>
-      </p:sp>
-      <p:sp>
-        <p:nvSpPr>
-          <p:cNvPr id="218" name="Google Shape;218;p21"/>
-          <p:cNvSpPr/>
-          <p:nvPr/>
-        </p:nvSpPr>
-        <p:spPr>
-          <a:xfrm>
-            <a:off x="571500" y="571500"/>
-            <a:ext cx="57150" cy="542925"/>
-          </a:xfrm>
-          <a:prstGeom prst="rect">
-            <a:avLst/>
-          </a:prstGeom>
-          <a:solidFill>
-            <a:srgbClr val="FF9900"/>
-          </a:solidFill>
-          <a:ln>
-            <a:noFill/>
-          </a:ln>
-        </p:spPr>
-        <p:txBody>
-          <a:bodyPr spcFirstLastPara="1" wrap="square" lIns="91425" tIns="45700" rIns="91425" bIns="45700" anchor="ctr" anchorCtr="0">
-            <a:noAutofit/>
-          </a:bodyPr>
-          <a:lstStyle/>
-          <a:p>
-            <a:pPr marL="0" marR="0" lvl="0" indent="0" algn="ctr" rtl="0">
-              <a:spcBef>
-                <a:spcPts val="0"/>
-              </a:spcBef>
-              <a:spcAft>
-                <a:spcPts val="0"/>
-              </a:spcAft>
-              <a:buNone/>
-            </a:pPr>
-            <a:endParaRPr sz="1800" b="0" i="0" u="none" strike="noStrike" cap="none">
-              <a:solidFill>
-                <a:schemeClr val="dk1"/>
-              </a:solidFill>
-              <a:latin typeface="Calibri"/>
-              <a:ea typeface="Calibri"/>
-              <a:cs typeface="Calibri"/>
-              <a:sym typeface="Calibri"/>
-            </a:endParaRPr>
-          </a:p>
-        </p:txBody>
-      </p:sp>
-    </p:spTree>
-  </p:cSld>
-  <p:clrMapOvr>
-    <a:masterClrMapping/>
-  </p:clrMapOvr>
-</p:sld>
-</file>
-
 <file path=ppt/theme/theme1.xml><?xml version="1.0" encoding="utf-8"?>
 <a:theme xmlns:a="http://schemas.openxmlformats.org/drawingml/2006/main" name="Office Theme">
   <a:themeElements>
